--- a/ai101/slides/week-05.pptx
+++ b/ai101/slides/week-05.pptx
@@ -12,6 +12,12 @@
     <p:sldId id="260" r:id="rId11"/>
     <p:sldId id="261" r:id="rId12"/>
     <p:sldId id="262" r:id="rId13"/>
+    <p:sldId id="263" r:id="rId14"/>
+    <p:sldId id="264" r:id="rId15"/>
+    <p:sldId id="265" r:id="rId16"/>
+    <p:sldId id="266" r:id="rId17"/>
+    <p:sldId id="267" r:id="rId18"/>
+    <p:sldId id="268" r:id="rId19"/>
   </p:sldIdLst>
   <p:sldSz cx="12191695" cy="6858000" type="screen4x3"/>
   <p:notesSz cx="6858000" cy="9144000"/>
@@ -3166,6 +3172,839 @@
 </p:sld>
 </file>
 
+<file path=ppt/slides/slide10.xml><?xml version="1.0" encoding="utf-8"?>
+<p:sld xmlns:a="http://schemas.openxmlformats.org/drawingml/2006/main" xmlns:p="http://schemas.openxmlformats.org/presentationml/2006/main" xmlns:r="http://schemas.openxmlformats.org/officeDocument/2006/relationships">
+  <p:cSld>
+    <p:bg>
+      <p:bgPr>
+        <a:solidFill>
+          <a:srgbClr val="102127"/>
+        </a:solidFill>
+        <a:effectLst/>
+      </p:bgPr>
+    </p:bg>
+    <p:spTree>
+      <p:nvGrpSpPr>
+        <p:cNvPr id="1" name=""/>
+        <p:cNvGrpSpPr/>
+        <p:nvPr/>
+      </p:nvGrpSpPr>
+      <p:grpSpPr/>
+      <p:sp>
+        <p:nvSpPr>
+          <p:cNvPr id="2" name="TextBox 1"/>
+          <p:cNvSpPr txBox="1"/>
+          <p:nvPr/>
+        </p:nvSpPr>
+        <p:spPr>
+          <a:xfrm>
+            <a:off x="502920" y="274320"/>
+            <a:ext cx="11155680" cy="731520"/>
+          </a:xfrm>
+          <a:prstGeom prst="rect">
+            <a:avLst/>
+          </a:prstGeom>
+          <a:noFill/>
+        </p:spPr>
+        <p:txBody>
+          <a:bodyPr wrap="none">
+            <a:spAutoFit/>
+          </a:bodyPr>
+          <a:lstStyle/>
+          <a:p>
+            <a:r>
+              <a:rPr sz="2600" b="1">
+                <a:solidFill>
+                  <a:srgbClr val="01AEFD"/>
+                </a:solidFill>
+              </a:rPr>
+              <a:t>Type this into script.js  (1 of 3)</a:t>
+            </a:r>
+          </a:p>
+        </p:txBody>
+      </p:sp>
+      <p:sp>
+        <p:nvSpPr>
+          <p:cNvPr id="3" name="TextBox 2"/>
+          <p:cNvSpPr txBox="1"/>
+          <p:nvPr/>
+        </p:nvSpPr>
+        <p:spPr>
+          <a:xfrm>
+            <a:off x="502920" y="1051560"/>
+            <a:ext cx="11155680" cy="5394960"/>
+          </a:xfrm>
+          <a:prstGeom prst="rect">
+            <a:avLst/>
+          </a:prstGeom>
+          <a:noFill/>
+        </p:spPr>
+        <p:txBody>
+          <a:bodyPr wrap="none">
+            <a:spAutoFit/>
+          </a:bodyPr>
+          <a:lstStyle/>
+          <a:p>
+            <a:pPr>
+              <a:spcAft>
+                <a:spcPts val="0"/>
+              </a:spcAft>
+            </a:pPr>
+            <a:r>
+              <a:rPr sz="1400">
+                <a:solidFill>
+                  <a:srgbClr val="6D8C97"/>
+                </a:solidFill>
+                <a:latin typeface="Consolas"/>
+              </a:rPr>
+              <a:t>  67  </a:t>
+            </a:r>
+            <a:r>
+              <a:rPr sz="1400">
+                <a:solidFill>
+                  <a:srgbClr val="DCECEF"/>
+                </a:solidFill>
+                <a:latin typeface="Consolas"/>
+              </a:rPr>
+              <a:t> </a:t>
+            </a:r>
+          </a:p>
+          <a:p>
+            <a:pPr>
+              <a:spcAft>
+                <a:spcPts val="0"/>
+              </a:spcAft>
+            </a:pPr>
+            <a:r>
+              <a:rPr sz="1400">
+                <a:solidFill>
+                  <a:srgbClr val="6D8C97"/>
+                </a:solidFill>
+                <a:latin typeface="Consolas"/>
+              </a:rPr>
+              <a:t>  68  </a:t>
+            </a:r>
+            <a:r>
+              <a:rPr sz="1400">
+                <a:solidFill>
+                  <a:srgbClr val="DCECEF"/>
+                </a:solidFill>
+                <a:latin typeface="Consolas"/>
+              </a:rPr>
+              <a:t>// The browser calls this when the form is submitted.</a:t>
+            </a:r>
+          </a:p>
+          <a:p>
+            <a:pPr>
+              <a:spcAft>
+                <a:spcPts val="0"/>
+              </a:spcAft>
+            </a:pPr>
+            <a:r>
+              <a:rPr sz="1400">
+                <a:solidFill>
+                  <a:srgbClr val="6D8C97"/>
+                </a:solidFill>
+                <a:latin typeface="Consolas"/>
+              </a:rPr>
+              <a:t>  69  </a:t>
+            </a:r>
+            <a:r>
+              <a:rPr sz="1400">
+                <a:solidFill>
+                  <a:srgbClr val="DCECEF"/>
+                </a:solidFill>
+                <a:latin typeface="Consolas"/>
+              </a:rPr>
+              <a:t>composer.addEventListener('submit', async function (event) {</a:t>
+            </a:r>
+          </a:p>
+          <a:p>
+            <a:pPr>
+              <a:spcAft>
+                <a:spcPts val="0"/>
+              </a:spcAft>
+            </a:pPr>
+            <a:r>
+              <a:rPr sz="1400">
+                <a:solidFill>
+                  <a:srgbClr val="6D8C97"/>
+                </a:solidFill>
+                <a:latin typeface="Consolas"/>
+              </a:rPr>
+              <a:t>  70  </a:t>
+            </a:r>
+            <a:r>
+              <a:rPr sz="1400">
+                <a:solidFill>
+                  <a:srgbClr val="DCECEF"/>
+                </a:solidFill>
+                <a:latin typeface="Consolas"/>
+              </a:rPr>
+              <a:t>  event.preventDefault();</a:t>
+            </a:r>
+          </a:p>
+          <a:p>
+            <a:pPr>
+              <a:spcAft>
+                <a:spcPts val="0"/>
+              </a:spcAft>
+            </a:pPr>
+            <a:r>
+              <a:rPr sz="1400">
+                <a:solidFill>
+                  <a:srgbClr val="6D8C97"/>
+                </a:solidFill>
+                <a:latin typeface="Consolas"/>
+              </a:rPr>
+              <a:t>  71  </a:t>
+            </a:r>
+            <a:r>
+              <a:rPr sz="1400">
+                <a:solidFill>
+                  <a:srgbClr val="DCECEF"/>
+                </a:solidFill>
+                <a:latin typeface="Consolas"/>
+              </a:rPr>
+              <a:t>  const text = promptBox.value.trim();</a:t>
+            </a:r>
+          </a:p>
+          <a:p>
+            <a:pPr>
+              <a:spcAft>
+                <a:spcPts val="0"/>
+              </a:spcAft>
+            </a:pPr>
+            <a:r>
+              <a:rPr sz="1400">
+                <a:solidFill>
+                  <a:srgbClr val="6D8C97"/>
+                </a:solidFill>
+                <a:latin typeface="Consolas"/>
+              </a:rPr>
+              <a:t>  72  </a:t>
+            </a:r>
+            <a:r>
+              <a:rPr sz="1400">
+                <a:solidFill>
+                  <a:srgbClr val="DCECEF"/>
+                </a:solidFill>
+                <a:latin typeface="Consolas"/>
+              </a:rPr>
+              <a:t>  if (text === '') { return; }</a:t>
+            </a:r>
+          </a:p>
+          <a:p>
+            <a:pPr>
+              <a:spcAft>
+                <a:spcPts val="0"/>
+              </a:spcAft>
+            </a:pPr>
+            <a:r>
+              <a:rPr sz="1400">
+                <a:solidFill>
+                  <a:srgbClr val="6D8C97"/>
+                </a:solidFill>
+                <a:latin typeface="Consolas"/>
+              </a:rPr>
+              <a:t>  73  </a:t>
+            </a:r>
+            <a:r>
+              <a:rPr sz="1400">
+                <a:solidFill>
+                  <a:srgbClr val="DCECEF"/>
+                </a:solidFill>
+                <a:latin typeface="Consolas"/>
+              </a:rPr>
+              <a:t>  promptBox.value = '';</a:t>
+            </a:r>
+          </a:p>
+          <a:p>
+            <a:pPr>
+              <a:spcAft>
+                <a:spcPts val="0"/>
+              </a:spcAft>
+            </a:pPr>
+            <a:r>
+              <a:rPr sz="1400">
+                <a:solidFill>
+                  <a:srgbClr val="6D8C97"/>
+                </a:solidFill>
+                <a:latin typeface="Consolas"/>
+              </a:rPr>
+              <a:t>  74  </a:t>
+            </a:r>
+            <a:r>
+              <a:rPr sz="1400">
+                <a:solidFill>
+                  <a:srgbClr val="DCECEF"/>
+                </a:solidFill>
+                <a:latin typeface="Consolas"/>
+              </a:rPr>
+              <a:t>  addLine('You', text);</a:t>
+            </a:r>
+          </a:p>
+          <a:p>
+            <a:pPr>
+              <a:spcAft>
+                <a:spcPts val="0"/>
+              </a:spcAft>
+            </a:pPr>
+            <a:r>
+              <a:rPr sz="1400">
+                <a:solidFill>
+                  <a:srgbClr val="6D8C97"/>
+                </a:solidFill>
+                <a:latin typeface="Consolas"/>
+              </a:rPr>
+              <a:t>  75  </a:t>
+            </a:r>
+            <a:r>
+              <a:rPr sz="1400">
+                <a:solidFill>
+                  <a:srgbClr val="DCECEF"/>
+                </a:solidFill>
+                <a:latin typeface="Consolas"/>
+              </a:rPr>
+              <a:t>  addLine('Companion', 'thinking...');</a:t>
+            </a:r>
+          </a:p>
+          <a:p>
+            <a:pPr>
+              <a:spcAft>
+                <a:spcPts val="0"/>
+              </a:spcAft>
+            </a:pPr>
+            <a:r>
+              <a:rPr sz="1400">
+                <a:solidFill>
+                  <a:srgbClr val="6D8C97"/>
+                </a:solidFill>
+                <a:latin typeface="Consolas"/>
+              </a:rPr>
+              <a:t>  76  </a:t>
+            </a:r>
+            <a:r>
+              <a:rPr sz="1400">
+                <a:solidFill>
+                  <a:srgbClr val="7FE0A0"/>
+                </a:solidFill>
+                <a:latin typeface="Consolas"/>
+              </a:rPr>
+              <a:t>  try {</a:t>
+            </a:r>
+          </a:p>
+          <a:p>
+            <a:pPr>
+              <a:spcAft>
+                <a:spcPts val="0"/>
+              </a:spcAft>
+            </a:pPr>
+            <a:r>
+              <a:rPr sz="1400">
+                <a:solidFill>
+                  <a:srgbClr val="6D8C97"/>
+                </a:solidFill>
+                <a:latin typeface="Consolas"/>
+              </a:rPr>
+              <a:t>  77  </a:t>
+            </a:r>
+            <a:r>
+              <a:rPr sz="1400">
+                <a:solidFill>
+                  <a:srgbClr val="7FE0A0"/>
+                </a:solidFill>
+                <a:latin typeface="Consolas"/>
+              </a:rPr>
+              <a:t>    const reply = await askAI(text);</a:t>
+            </a:r>
+          </a:p>
+          <a:p>
+            <a:pPr>
+              <a:spcAft>
+                <a:spcPts val="0"/>
+              </a:spcAft>
+            </a:pPr>
+            <a:r>
+              <a:rPr sz="1400">
+                <a:solidFill>
+                  <a:srgbClr val="6D8C97"/>
+                </a:solidFill>
+                <a:latin typeface="Consolas"/>
+              </a:rPr>
+              <a:t>  78  </a:t>
+            </a:r>
+            <a:r>
+              <a:rPr sz="1400">
+                <a:solidFill>
+                  <a:srgbClr val="7FE0A0"/>
+                </a:solidFill>
+                <a:latin typeface="Consolas"/>
+              </a:rPr>
+              <a:t>    chat.lastChild.remove();</a:t>
+            </a:r>
+          </a:p>
+          <a:p>
+            <a:pPr>
+              <a:spcAft>
+                <a:spcPts val="0"/>
+              </a:spcAft>
+            </a:pPr>
+            <a:r>
+              <a:rPr sz="1400">
+                <a:solidFill>
+                  <a:srgbClr val="6D8C97"/>
+                </a:solidFill>
+                <a:latin typeface="Consolas"/>
+              </a:rPr>
+              <a:t>  79  </a:t>
+            </a:r>
+            <a:r>
+              <a:rPr sz="1400">
+                <a:solidFill>
+                  <a:srgbClr val="7FE0A0"/>
+                </a:solidFill>
+                <a:latin typeface="Consolas"/>
+              </a:rPr>
+              <a:t>    addLine('Companion', reply);</a:t>
+            </a:r>
+          </a:p>
+          <a:p>
+            <a:pPr>
+              <a:spcAft>
+                <a:spcPts val="0"/>
+              </a:spcAft>
+            </a:pPr>
+            <a:r>
+              <a:rPr sz="1400">
+                <a:solidFill>
+                  <a:srgbClr val="6D8C97"/>
+                </a:solidFill>
+                <a:latin typeface="Consolas"/>
+              </a:rPr>
+              <a:t>  80  </a:t>
+            </a:r>
+            <a:r>
+              <a:rPr sz="1400">
+                <a:solidFill>
+                  <a:srgbClr val="7FE0A0"/>
+                </a:solidFill>
+                <a:latin typeface="Consolas"/>
+              </a:rPr>
+              <a:t>  } catch (problem) {</a:t>
+            </a:r>
+          </a:p>
+          <a:p>
+            <a:pPr>
+              <a:spcAft>
+                <a:spcPts val="0"/>
+              </a:spcAft>
+            </a:pPr>
+            <a:r>
+              <a:rPr sz="1400">
+                <a:solidFill>
+                  <a:srgbClr val="6D8C97"/>
+                </a:solidFill>
+                <a:latin typeface="Consolas"/>
+              </a:rPr>
+              <a:t>  81  </a:t>
+            </a:r>
+            <a:r>
+              <a:rPr sz="1400">
+                <a:solidFill>
+                  <a:srgbClr val="7FE0A0"/>
+                </a:solidFill>
+                <a:latin typeface="Consolas"/>
+              </a:rPr>
+              <a:t>    chat.lastChild.remove();</a:t>
+            </a:r>
+          </a:p>
+        </p:txBody>
+      </p:sp>
+    </p:spTree>
+  </p:cSld>
+  <p:clrMapOvr>
+    <a:masterClrMapping/>
+  </p:clrMapOvr>
+</p:sld>
+</file>
+
+<file path=ppt/slides/slide11.xml><?xml version="1.0" encoding="utf-8"?>
+<p:sld xmlns:a="http://schemas.openxmlformats.org/drawingml/2006/main" xmlns:p="http://schemas.openxmlformats.org/presentationml/2006/main" xmlns:r="http://schemas.openxmlformats.org/officeDocument/2006/relationships">
+  <p:cSld>
+    <p:bg>
+      <p:bgPr>
+        <a:solidFill>
+          <a:srgbClr val="102127"/>
+        </a:solidFill>
+        <a:effectLst/>
+      </p:bgPr>
+    </p:bg>
+    <p:spTree>
+      <p:nvGrpSpPr>
+        <p:cNvPr id="1" name=""/>
+        <p:cNvGrpSpPr/>
+        <p:nvPr/>
+      </p:nvGrpSpPr>
+      <p:grpSpPr/>
+      <p:sp>
+        <p:nvSpPr>
+          <p:cNvPr id="2" name="TextBox 1"/>
+          <p:cNvSpPr txBox="1"/>
+          <p:nvPr/>
+        </p:nvSpPr>
+        <p:spPr>
+          <a:xfrm>
+            <a:off x="502920" y="274320"/>
+            <a:ext cx="11155680" cy="731520"/>
+          </a:xfrm>
+          <a:prstGeom prst="rect">
+            <a:avLst/>
+          </a:prstGeom>
+          <a:noFill/>
+        </p:spPr>
+        <p:txBody>
+          <a:bodyPr wrap="none">
+            <a:spAutoFit/>
+          </a:bodyPr>
+          <a:lstStyle/>
+          <a:p>
+            <a:r>
+              <a:rPr sz="2600" b="1">
+                <a:solidFill>
+                  <a:srgbClr val="01AEFD"/>
+                </a:solidFill>
+              </a:rPr>
+              <a:t>Type this into script.js  (2 of 3)</a:t>
+            </a:r>
+          </a:p>
+        </p:txBody>
+      </p:sp>
+      <p:sp>
+        <p:nvSpPr>
+          <p:cNvPr id="3" name="TextBox 2"/>
+          <p:cNvSpPr txBox="1"/>
+          <p:nvPr/>
+        </p:nvSpPr>
+        <p:spPr>
+          <a:xfrm>
+            <a:off x="502920" y="1051560"/>
+            <a:ext cx="11155680" cy="5394960"/>
+          </a:xfrm>
+          <a:prstGeom prst="rect">
+            <a:avLst/>
+          </a:prstGeom>
+          <a:noFill/>
+        </p:spPr>
+        <p:txBody>
+          <a:bodyPr wrap="none">
+            <a:spAutoFit/>
+          </a:bodyPr>
+          <a:lstStyle/>
+          <a:p>
+            <a:pPr>
+              <a:spcAft>
+                <a:spcPts val="0"/>
+              </a:spcAft>
+            </a:pPr>
+            <a:r>
+              <a:rPr sz="1700">
+                <a:solidFill>
+                  <a:srgbClr val="6D8C97"/>
+                </a:solidFill>
+                <a:latin typeface="Consolas"/>
+              </a:rPr>
+              <a:t>  82  </a:t>
+            </a:r>
+            <a:r>
+              <a:rPr sz="1700">
+                <a:solidFill>
+                  <a:srgbClr val="7FE0A0"/>
+                </a:solidFill>
+                <a:latin typeface="Consolas"/>
+              </a:rPr>
+              <a:t>    addLine('Problem', problem.message);   // say what went wrong, out loud</a:t>
+            </a:r>
+          </a:p>
+          <a:p>
+            <a:pPr>
+              <a:spcAft>
+                <a:spcPts val="0"/>
+              </a:spcAft>
+            </a:pPr>
+            <a:r>
+              <a:rPr sz="1700">
+                <a:solidFill>
+                  <a:srgbClr val="6D8C97"/>
+                </a:solidFill>
+                <a:latin typeface="Consolas"/>
+              </a:rPr>
+              <a:t>  83  </a:t>
+            </a:r>
+            <a:r>
+              <a:rPr sz="1700">
+                <a:solidFill>
+                  <a:srgbClr val="7FE0A0"/>
+                </a:solidFill>
+                <a:latin typeface="Consolas"/>
+              </a:rPr>
+              <a:t>  }</a:t>
+            </a:r>
+          </a:p>
+          <a:p>
+            <a:pPr>
+              <a:spcAft>
+                <a:spcPts val="0"/>
+              </a:spcAft>
+            </a:pPr>
+            <a:r>
+              <a:rPr sz="1700">
+                <a:solidFill>
+                  <a:srgbClr val="6D8C97"/>
+                </a:solidFill>
+                <a:latin typeface="Consolas"/>
+              </a:rPr>
+              <a:t>  84  </a:t>
+            </a:r>
+            <a:r>
+              <a:rPr sz="1700">
+                <a:solidFill>
+                  <a:srgbClr val="DCECEF"/>
+                </a:solidFill>
+                <a:latin typeface="Consolas"/>
+              </a:rPr>
+              <a:t>});</a:t>
+            </a:r>
+          </a:p>
+        </p:txBody>
+      </p:sp>
+    </p:spTree>
+  </p:cSld>
+  <p:clrMapOvr>
+    <a:masterClrMapping/>
+  </p:clrMapOvr>
+</p:sld>
+</file>
+
+<file path=ppt/slides/slide12.xml><?xml version="1.0" encoding="utf-8"?>
+<p:sld xmlns:a="http://schemas.openxmlformats.org/drawingml/2006/main" xmlns:p="http://schemas.openxmlformats.org/presentationml/2006/main" xmlns:r="http://schemas.openxmlformats.org/officeDocument/2006/relationships">
+  <p:cSld>
+    <p:bg>
+      <p:bgPr>
+        <a:solidFill>
+          <a:srgbClr val="102127"/>
+        </a:solidFill>
+        <a:effectLst/>
+      </p:bgPr>
+    </p:bg>
+    <p:spTree>
+      <p:nvGrpSpPr>
+        <p:cNvPr id="1" name=""/>
+        <p:cNvGrpSpPr/>
+        <p:nvPr/>
+      </p:nvGrpSpPr>
+      <p:grpSpPr/>
+      <p:sp>
+        <p:nvSpPr>
+          <p:cNvPr id="2" name="TextBox 1"/>
+          <p:cNvSpPr txBox="1"/>
+          <p:nvPr/>
+        </p:nvSpPr>
+        <p:spPr>
+          <a:xfrm>
+            <a:off x="502920" y="274320"/>
+            <a:ext cx="11155680" cy="731520"/>
+          </a:xfrm>
+          <a:prstGeom prst="rect">
+            <a:avLst/>
+          </a:prstGeom>
+          <a:noFill/>
+        </p:spPr>
+        <p:txBody>
+          <a:bodyPr wrap="none">
+            <a:spAutoFit/>
+          </a:bodyPr>
+          <a:lstStyle/>
+          <a:p>
+            <a:r>
+              <a:rPr sz="2600" b="1">
+                <a:solidFill>
+                  <a:srgbClr val="01AEFD"/>
+                </a:solidFill>
+              </a:rPr>
+              <a:t>Type this into style.css  (3 of 3)</a:t>
+            </a:r>
+          </a:p>
+        </p:txBody>
+      </p:sp>
+      <p:sp>
+        <p:nvSpPr>
+          <p:cNvPr id="3" name="TextBox 2"/>
+          <p:cNvSpPr txBox="1"/>
+          <p:nvPr/>
+        </p:nvSpPr>
+        <p:spPr>
+          <a:xfrm>
+            <a:off x="502920" y="1051560"/>
+            <a:ext cx="11155680" cy="5394960"/>
+          </a:xfrm>
+          <a:prstGeom prst="rect">
+            <a:avLst/>
+          </a:prstGeom>
+          <a:noFill/>
+        </p:spPr>
+        <p:txBody>
+          <a:bodyPr wrap="none">
+            <a:spAutoFit/>
+          </a:bodyPr>
+          <a:lstStyle/>
+          <a:p>
+            <a:pPr>
+              <a:spcAft>
+                <a:spcPts val="0"/>
+              </a:spcAft>
+            </a:pPr>
+            <a:r>
+              <a:rPr sz="1700">
+                <a:solidFill>
+                  <a:srgbClr val="6D8C97"/>
+                </a:solidFill>
+                <a:latin typeface="Consolas"/>
+              </a:rPr>
+              <a:t>  21  </a:t>
+            </a:r>
+            <a:r>
+              <a:rPr sz="1700">
+                <a:solidFill>
+                  <a:srgbClr val="7FE0A0"/>
+                </a:solidFill>
+                <a:latin typeface="Consolas"/>
+              </a:rPr>
+              <a:t>.chat p { margin: 0 0 10px; line-height: 1.5; }</a:t>
+            </a:r>
+          </a:p>
+        </p:txBody>
+      </p:sp>
+    </p:spTree>
+  </p:cSld>
+  <p:clrMapOvr>
+    <a:masterClrMapping/>
+  </p:clrMapOvr>
+</p:sld>
+</file>
+
+<file path=ppt/slides/slide13.xml><?xml version="1.0" encoding="utf-8"?>
+<p:sld xmlns:a="http://schemas.openxmlformats.org/drawingml/2006/main" xmlns:p="http://schemas.openxmlformats.org/presentationml/2006/main" xmlns:r="http://schemas.openxmlformats.org/officeDocument/2006/relationships">
+  <p:cSld>
+    <p:spTree>
+      <p:nvGrpSpPr>
+        <p:cNvPr id="1" name=""/>
+        <p:cNvGrpSpPr/>
+        <p:nvPr/>
+      </p:nvGrpSpPr>
+      <p:grpSpPr/>
+      <p:sp>
+        <p:nvSpPr>
+          <p:cNvPr id="2" name="Title 1"/>
+          <p:cNvSpPr>
+            <a:spLocks noGrp="1"/>
+          </p:cNvSpPr>
+          <p:nvPr>
+            <p:ph type="title"/>
+          </p:nvPr>
+        </p:nvSpPr>
+        <p:spPr/>
+        <p:txBody>
+          <a:bodyPr/>
+          <a:lstStyle/>
+          <a:p>
+            <a:r>
+              <a:rPr sz="3800" b="1">
+                <a:solidFill>
+                  <a:srgbClr val="1F2A37"/>
+                </a:solidFill>
+              </a:rPr>
+              <a:t>40 requests a minute</a:t>
+            </a:r>
+          </a:p>
+        </p:txBody>
+      </p:sp>
+      <p:sp>
+        <p:nvSpPr>
+          <p:cNvPr id="3" name="TextBox 2"/>
+          <p:cNvSpPr txBox="1"/>
+          <p:nvPr/>
+        </p:nvSpPr>
+        <p:spPr>
+          <a:xfrm>
+            <a:off x="822960" y="1828800"/>
+            <a:ext cx="10515600" cy="4206240"/>
+          </a:xfrm>
+          <a:prstGeom prst="rect">
+            <a:avLst/>
+          </a:prstGeom>
+          <a:noFill/>
+        </p:spPr>
+        <p:txBody>
+          <a:bodyPr wrap="square">
+            <a:spAutoFit/>
+          </a:bodyPr>
+          <a:lstStyle/>
+          <a:p>
+            <a:pPr>
+              <a:spcAft>
+                <a:spcPts val="1400"/>
+              </a:spcAft>
+            </a:pPr>
+            <a:r>
+              <a:rPr sz="2800">
+                <a:solidFill>
+                  <a:srgbClr val="01AEFD"/>
+                </a:solidFill>
+              </a:rPr>
+              <a:t>One graphics card, fifteen of you</a:t>
+            </a:r>
+          </a:p>
+          <a:p>
+            <a:pPr>
+              <a:spcAft>
+                <a:spcPts val="1400"/>
+              </a:spcAft>
+            </a:pPr>
+            <a:r>
+              <a:rPr sz="2400">
+                <a:solidFill>
+                  <a:srgbClr val="1F2A37"/>
+                </a:solidFill>
+              </a:rPr>
+              <a:t>• It is a queue, not a punishment</a:t>
+            </a:r>
+          </a:p>
+          <a:p>
+            <a:pPr>
+              <a:spcAft>
+                <a:spcPts val="1400"/>
+              </a:spcAft>
+            </a:pPr>
+            <a:r>
+              <a:rPr sz="2400">
+                <a:solidFill>
+                  <a:srgbClr val="1F2A37"/>
+                </a:solidFill>
+              </a:rPr>
+              <a:t>• Good software waits politely</a:t>
+            </a:r>
+          </a:p>
+        </p:txBody>
+      </p:sp>
+    </p:spTree>
+  </p:cSld>
+  <p:clrMapOvr>
+    <a:masterClrMapping/>
+  </p:clrMapOvr>
+</p:sld>
+</file>
+
 <file path=ppt/slides/slide2.xml><?xml version="1.0" encoding="utf-8"?>
 <p:sld xmlns:a="http://schemas.openxmlformats.org/drawingml/2006/main" xmlns:p="http://schemas.openxmlformats.org/presentationml/2006/main" xmlns:r="http://schemas.openxmlformats.org/officeDocument/2006/relationships">
   <p:cSld>
@@ -3647,6 +4486,14 @@
 <file path=ppt/slides/slide6.xml><?xml version="1.0" encoding="utf-8"?>
 <p:sld xmlns:a="http://schemas.openxmlformats.org/drawingml/2006/main" xmlns:p="http://schemas.openxmlformats.org/presentationml/2006/main" xmlns:r="http://schemas.openxmlformats.org/officeDocument/2006/relationships">
   <p:cSld>
+    <p:bg>
+      <p:bgPr>
+        <a:solidFill>
+          <a:srgbClr val="102127"/>
+        </a:solidFill>
+        <a:effectLst/>
+      </p:bgPr>
+    </p:bg>
     <p:spTree>
       <p:nvGrpSpPr>
         <p:cNvPr id="1" name=""/>
@@ -3656,40 +4503,14 @@
       <p:grpSpPr/>
       <p:sp>
         <p:nvSpPr>
-          <p:cNvPr id="2" name="Title 1"/>
-          <p:cNvSpPr>
-            <a:spLocks noGrp="1"/>
-          </p:cNvSpPr>
-          <p:nvPr>
-            <p:ph type="title"/>
-          </p:nvPr>
-        </p:nvSpPr>
-        <p:spPr/>
-        <p:txBody>
-          <a:bodyPr/>
-          <a:lstStyle/>
-          <a:p>
-            <a:r>
-              <a:rPr sz="3800" b="1">
-                <a:solidFill>
-                  <a:srgbClr val="1F2A37"/>
-                </a:solidFill>
-              </a:rPr>
-              <a:t>try and catch</a:t>
-            </a:r>
-          </a:p>
-        </p:txBody>
-      </p:sp>
-      <p:sp>
-        <p:nvSpPr>
-          <p:cNvPr id="3" name="TextBox 2"/>
+          <p:cNvPr id="2" name="TextBox 1"/>
           <p:cNvSpPr txBox="1"/>
           <p:nvPr/>
         </p:nvSpPr>
         <p:spPr>
           <a:xfrm>
-            <a:off x="822960" y="1828800"/>
-            <a:ext cx="10515600" cy="4206240"/>
+            <a:off x="502920" y="274320"/>
+            <a:ext cx="11155680" cy="731520"/>
           </a:xfrm>
           <a:prstGeom prst="rect">
             <a:avLst/>
@@ -3697,53 +4518,416 @@
           <a:noFill/>
         </p:spPr>
         <p:txBody>
-          <a:bodyPr wrap="square">
+          <a:bodyPr wrap="none">
             <a:spAutoFit/>
           </a:bodyPr>
           <a:lstStyle/>
           <a:p>
-            <a:pPr>
-              <a:spcAft>
-                <a:spcPts val="1400"/>
-              </a:spcAft>
-            </a:pPr>
-            <a:r>
-              <a:rPr sz="2400">
-                <a:solidFill>
-                  <a:srgbClr val="1F2A37"/>
-                </a:solidFill>
-              </a:rPr>
-              <a:t>• try - attempt this</a:t>
-            </a:r>
-          </a:p>
-          <a:p>
-            <a:pPr>
-              <a:spcAft>
-                <a:spcPts val="1400"/>
-              </a:spcAft>
-            </a:pPr>
-            <a:r>
-              <a:rPr sz="2400">
-                <a:solidFill>
-                  <a:srgbClr val="1F2A37"/>
-                </a:solidFill>
-              </a:rPr>
-              <a:t>• catch - it shouted; here is what the user sees</a:t>
-            </a:r>
-          </a:p>
-          <a:p>
-            <a:pPr>
-              <a:spcAft>
-                <a:spcPts val="1400"/>
-              </a:spcAft>
-            </a:pPr>
-            <a:r>
-              <a:rPr sz="2400">
-                <a:solidFill>
-                  <a:srgbClr val="1F2A37"/>
-                </a:solidFill>
-              </a:rPr>
-              <a:t>• Without it, failure looks like nothing happening</a:t>
+            <a:r>
+              <a:rPr sz="2600" b="1">
+                <a:solidFill>
+                  <a:srgbClr val="01AEFD"/>
+                </a:solidFill>
+              </a:rPr>
+              <a:t>Type this into script.js  (1 of 3)</a:t>
+            </a:r>
+          </a:p>
+        </p:txBody>
+      </p:sp>
+      <p:sp>
+        <p:nvSpPr>
+          <p:cNvPr id="3" name="TextBox 2"/>
+          <p:cNvSpPr txBox="1"/>
+          <p:nvPr/>
+        </p:nvSpPr>
+        <p:spPr>
+          <a:xfrm>
+            <a:off x="502920" y="1051560"/>
+            <a:ext cx="11155680" cy="5394960"/>
+          </a:xfrm>
+          <a:prstGeom prst="rect">
+            <a:avLst/>
+          </a:prstGeom>
+          <a:noFill/>
+        </p:spPr>
+        <p:txBody>
+          <a:bodyPr wrap="none">
+            <a:spAutoFit/>
+          </a:bodyPr>
+          <a:lstStyle/>
+          <a:p>
+            <a:pPr>
+              <a:spcAft>
+                <a:spcPts val="0"/>
+              </a:spcAft>
+            </a:pPr>
+            <a:r>
+              <a:rPr sz="1400">
+                <a:solidFill>
+                  <a:srgbClr val="6D8C97"/>
+                </a:solidFill>
+                <a:latin typeface="Consolas"/>
+              </a:rPr>
+              <a:t>  39  </a:t>
+            </a:r>
+            <a:r>
+              <a:rPr sz="1400">
+                <a:solidFill>
+                  <a:srgbClr val="DCECEF"/>
+                </a:solidFill>
+                <a:latin typeface="Consolas"/>
+              </a:rPr>
+              <a:t> </a:t>
+            </a:r>
+          </a:p>
+          <a:p>
+            <a:pPr>
+              <a:spcAft>
+                <a:spcPts val="0"/>
+              </a:spcAft>
+            </a:pPr>
+            <a:r>
+              <a:rPr sz="1400">
+                <a:solidFill>
+                  <a:srgbClr val="6D8C97"/>
+                </a:solidFill>
+                <a:latin typeface="Consolas"/>
+              </a:rPr>
+              <a:t>  40  </a:t>
+            </a:r>
+            <a:r>
+              <a:rPr sz="1400">
+                <a:solidFill>
+                  <a:srgbClr val="DCECEF"/>
+                </a:solidFill>
+                <a:latin typeface="Consolas"/>
+              </a:rPr>
+              <a:t>// Week 4: ask the AI a real question.</a:t>
+            </a:r>
+          </a:p>
+          <a:p>
+            <a:pPr>
+              <a:spcAft>
+                <a:spcPts val="0"/>
+              </a:spcAft>
+            </a:pPr>
+            <a:r>
+              <a:rPr sz="1400">
+                <a:solidFill>
+                  <a:srgbClr val="6D8C97"/>
+                </a:solidFill>
+                <a:latin typeface="Consolas"/>
+              </a:rPr>
+              <a:t>  41  </a:t>
+            </a:r>
+            <a:r>
+              <a:rPr sz="1400">
+                <a:solidFill>
+                  <a:srgbClr val="DCECEF"/>
+                </a:solidFill>
+                <a:latin typeface="Consolas"/>
+              </a:rPr>
+              <a:t>// A chat request is a LIST of messages. Each one says who said it.</a:t>
+            </a:r>
+          </a:p>
+          <a:p>
+            <a:pPr>
+              <a:spcAft>
+                <a:spcPts val="0"/>
+              </a:spcAft>
+            </a:pPr>
+            <a:r>
+              <a:rPr sz="1400">
+                <a:solidFill>
+                  <a:srgbClr val="6D8C97"/>
+                </a:solidFill>
+                <a:latin typeface="Consolas"/>
+              </a:rPr>
+              <a:t>  42  </a:t>
+            </a:r>
+            <a:r>
+              <a:rPr sz="1400">
+                <a:solidFill>
+                  <a:srgbClr val="DCECEF"/>
+                </a:solidFill>
+                <a:latin typeface="Consolas"/>
+              </a:rPr>
+              <a:t>async function askAI(question) {</a:t>
+            </a:r>
+          </a:p>
+          <a:p>
+            <a:pPr>
+              <a:spcAft>
+                <a:spcPts val="0"/>
+              </a:spcAft>
+            </a:pPr>
+            <a:r>
+              <a:rPr sz="1400">
+                <a:solidFill>
+                  <a:srgbClr val="6D8C97"/>
+                </a:solidFill>
+                <a:latin typeface="Consolas"/>
+              </a:rPr>
+              <a:t>  43  </a:t>
+            </a:r>
+            <a:r>
+              <a:rPr sz="1400">
+                <a:solidFill>
+                  <a:srgbClr val="DCECEF"/>
+                </a:solidFill>
+                <a:latin typeface="Consolas"/>
+              </a:rPr>
+              <a:t>  const res = await fetch(AI_BASE + '/v1/chat/completions', {</a:t>
+            </a:r>
+          </a:p>
+          <a:p>
+            <a:pPr>
+              <a:spcAft>
+                <a:spcPts val="0"/>
+              </a:spcAft>
+            </a:pPr>
+            <a:r>
+              <a:rPr sz="1400">
+                <a:solidFill>
+                  <a:srgbClr val="6D8C97"/>
+                </a:solidFill>
+                <a:latin typeface="Consolas"/>
+              </a:rPr>
+              <a:t>  44  </a:t>
+            </a:r>
+            <a:r>
+              <a:rPr sz="1400">
+                <a:solidFill>
+                  <a:srgbClr val="DCECEF"/>
+                </a:solidFill>
+                <a:latin typeface="Consolas"/>
+              </a:rPr>
+              <a:t>    method: 'POST',                       // POST = I am sending you something</a:t>
+            </a:r>
+          </a:p>
+          <a:p>
+            <a:pPr>
+              <a:spcAft>
+                <a:spcPts val="0"/>
+              </a:spcAft>
+            </a:pPr>
+            <a:r>
+              <a:rPr sz="1400">
+                <a:solidFill>
+                  <a:srgbClr val="6D8C97"/>
+                </a:solidFill>
+                <a:latin typeface="Consolas"/>
+              </a:rPr>
+              <a:t>  45  </a:t>
+            </a:r>
+            <a:r>
+              <a:rPr sz="1400">
+                <a:solidFill>
+                  <a:srgbClr val="DCECEF"/>
+                </a:solidFill>
+                <a:latin typeface="Consolas"/>
+              </a:rPr>
+              <a:t>    headers: {</a:t>
+            </a:r>
+          </a:p>
+          <a:p>
+            <a:pPr>
+              <a:spcAft>
+                <a:spcPts val="0"/>
+              </a:spcAft>
+            </a:pPr>
+            <a:r>
+              <a:rPr sz="1400">
+                <a:solidFill>
+                  <a:srgbClr val="6D8C97"/>
+                </a:solidFill>
+                <a:latin typeface="Consolas"/>
+              </a:rPr>
+              <a:t>  46  </a:t>
+            </a:r>
+            <a:r>
+              <a:rPr sz="1400">
+                <a:solidFill>
+                  <a:srgbClr val="DCECEF"/>
+                </a:solidFill>
+                <a:latin typeface="Consolas"/>
+              </a:rPr>
+              <a:t>      'Content-Type': 'application/json', // what I am sending is JSON</a:t>
+            </a:r>
+          </a:p>
+          <a:p>
+            <a:pPr>
+              <a:spcAft>
+                <a:spcPts val="0"/>
+              </a:spcAft>
+            </a:pPr>
+            <a:r>
+              <a:rPr sz="1400">
+                <a:solidFill>
+                  <a:srgbClr val="6D8C97"/>
+                </a:solidFill>
+                <a:latin typeface="Consolas"/>
+              </a:rPr>
+              <a:t>  47  </a:t>
+            </a:r>
+            <a:r>
+              <a:rPr sz="1400">
+                <a:solidFill>
+                  <a:srgbClr val="DCECEF"/>
+                </a:solidFill>
+                <a:latin typeface="Consolas"/>
+              </a:rPr>
+              <a:t>      'Authorization': 'Bearer ' + API_KEY</a:t>
+            </a:r>
+          </a:p>
+          <a:p>
+            <a:pPr>
+              <a:spcAft>
+                <a:spcPts val="0"/>
+              </a:spcAft>
+            </a:pPr>
+            <a:r>
+              <a:rPr sz="1400">
+                <a:solidFill>
+                  <a:srgbClr val="6D8C97"/>
+                </a:solidFill>
+                <a:latin typeface="Consolas"/>
+              </a:rPr>
+              <a:t>  48  </a:t>
+            </a:r>
+            <a:r>
+              <a:rPr sz="1400">
+                <a:solidFill>
+                  <a:srgbClr val="DCECEF"/>
+                </a:solidFill>
+                <a:latin typeface="Consolas"/>
+              </a:rPr>
+              <a:t>    },</a:t>
+            </a:r>
+          </a:p>
+          <a:p>
+            <a:pPr>
+              <a:spcAft>
+                <a:spcPts val="0"/>
+              </a:spcAft>
+            </a:pPr>
+            <a:r>
+              <a:rPr sz="1400">
+                <a:solidFill>
+                  <a:srgbClr val="6D8C97"/>
+                </a:solidFill>
+                <a:latin typeface="Consolas"/>
+              </a:rPr>
+              <a:t>  49  </a:t>
+            </a:r>
+            <a:r>
+              <a:rPr sz="1400">
+                <a:solidFill>
+                  <a:srgbClr val="DCECEF"/>
+                </a:solidFill>
+                <a:latin typeface="Consolas"/>
+              </a:rPr>
+              <a:t>    body: JSON.stringify({</a:t>
+            </a:r>
+          </a:p>
+          <a:p>
+            <a:pPr>
+              <a:spcAft>
+                <a:spcPts val="0"/>
+              </a:spcAft>
+            </a:pPr>
+            <a:r>
+              <a:rPr sz="1400">
+                <a:solidFill>
+                  <a:srgbClr val="6D8C97"/>
+                </a:solidFill>
+                <a:latin typeface="Consolas"/>
+              </a:rPr>
+              <a:t>  50  </a:t>
+            </a:r>
+            <a:r>
+              <a:rPr sz="1400">
+                <a:solidFill>
+                  <a:srgbClr val="DCECEF"/>
+                </a:solidFill>
+                <a:latin typeface="Consolas"/>
+              </a:rPr>
+              <a:t>      model: 'fast',</a:t>
+            </a:r>
+          </a:p>
+          <a:p>
+            <a:pPr>
+              <a:spcAft>
+                <a:spcPts val="0"/>
+              </a:spcAft>
+            </a:pPr>
+            <a:r>
+              <a:rPr sz="1400">
+                <a:solidFill>
+                  <a:srgbClr val="6D8C97"/>
+                </a:solidFill>
+                <a:latin typeface="Consolas"/>
+              </a:rPr>
+              <a:t>  51  </a:t>
+            </a:r>
+            <a:r>
+              <a:rPr sz="1400">
+                <a:solidFill>
+                  <a:srgbClr val="DCECEF"/>
+                </a:solidFill>
+                <a:latin typeface="Consolas"/>
+              </a:rPr>
+              <a:t>      messages: [</a:t>
+            </a:r>
+          </a:p>
+          <a:p>
+            <a:pPr>
+              <a:spcAft>
+                <a:spcPts val="0"/>
+              </a:spcAft>
+            </a:pPr>
+            <a:r>
+              <a:rPr sz="1400">
+                <a:solidFill>
+                  <a:srgbClr val="6D8C97"/>
+                </a:solidFill>
+                <a:latin typeface="Consolas"/>
+              </a:rPr>
+              <a:t>  52  </a:t>
+            </a:r>
+            <a:r>
+              <a:rPr sz="1400">
+                <a:solidFill>
+                  <a:srgbClr val="DCECEF"/>
+                </a:solidFill>
+                <a:latin typeface="Consolas"/>
+              </a:rPr>
+              <a:t>        { role: 'user', content: question }</a:t>
+            </a:r>
+          </a:p>
+          <a:p>
+            <a:pPr>
+              <a:spcAft>
+                <a:spcPts val="0"/>
+              </a:spcAft>
+            </a:pPr>
+            <a:r>
+              <a:rPr sz="1400">
+                <a:solidFill>
+                  <a:srgbClr val="6D8C97"/>
+                </a:solidFill>
+                <a:latin typeface="Consolas"/>
+              </a:rPr>
+              <a:t>  53  </a:t>
+            </a:r>
+            <a:r>
+              <a:rPr sz="1400">
+                <a:solidFill>
+                  <a:srgbClr val="DCECEF"/>
+                </a:solidFill>
+                <a:latin typeface="Consolas"/>
+              </a:rPr>
+              <a:t>      ]</a:t>
             </a:r>
           </a:p>
         </p:txBody>
@@ -3759,6 +4943,14 @@
 <file path=ppt/slides/slide7.xml><?xml version="1.0" encoding="utf-8"?>
 <p:sld xmlns:a="http://schemas.openxmlformats.org/drawingml/2006/main" xmlns:p="http://schemas.openxmlformats.org/presentationml/2006/main" xmlns:r="http://schemas.openxmlformats.org/officeDocument/2006/relationships">
   <p:cSld>
+    <p:bg>
+      <p:bgPr>
+        <a:solidFill>
+          <a:srgbClr val="102127"/>
+        </a:solidFill>
+        <a:effectLst/>
+      </p:bgPr>
+    </p:bg>
     <p:spTree>
       <p:nvGrpSpPr>
         <p:cNvPr id="1" name=""/>
@@ -3768,6 +4960,687 @@
       <p:grpSpPr/>
       <p:sp>
         <p:nvSpPr>
+          <p:cNvPr id="2" name="TextBox 1"/>
+          <p:cNvSpPr txBox="1"/>
+          <p:nvPr/>
+        </p:nvSpPr>
+        <p:spPr>
+          <a:xfrm>
+            <a:off x="502920" y="274320"/>
+            <a:ext cx="11155680" cy="731520"/>
+          </a:xfrm>
+          <a:prstGeom prst="rect">
+            <a:avLst/>
+          </a:prstGeom>
+          <a:noFill/>
+        </p:spPr>
+        <p:txBody>
+          <a:bodyPr wrap="none">
+            <a:spAutoFit/>
+          </a:bodyPr>
+          <a:lstStyle/>
+          <a:p>
+            <a:r>
+              <a:rPr sz="2600" b="1">
+                <a:solidFill>
+                  <a:srgbClr val="01AEFD"/>
+                </a:solidFill>
+              </a:rPr>
+              <a:t>Type this into script.js  (2 of 3)</a:t>
+            </a:r>
+          </a:p>
+        </p:txBody>
+      </p:sp>
+      <p:sp>
+        <p:nvSpPr>
+          <p:cNvPr id="3" name="TextBox 2"/>
+          <p:cNvSpPr txBox="1"/>
+          <p:nvPr/>
+        </p:nvSpPr>
+        <p:spPr>
+          <a:xfrm>
+            <a:off x="502920" y="1051560"/>
+            <a:ext cx="11155680" cy="5394960"/>
+          </a:xfrm>
+          <a:prstGeom prst="rect">
+            <a:avLst/>
+          </a:prstGeom>
+          <a:noFill/>
+        </p:spPr>
+        <p:txBody>
+          <a:bodyPr wrap="none">
+            <a:spAutoFit/>
+          </a:bodyPr>
+          <a:lstStyle/>
+          <a:p>
+            <a:pPr>
+              <a:spcAft>
+                <a:spcPts val="0"/>
+              </a:spcAft>
+            </a:pPr>
+            <a:r>
+              <a:rPr sz="1400">
+                <a:solidFill>
+                  <a:srgbClr val="6D8C97"/>
+                </a:solidFill>
+                <a:latin typeface="Consolas"/>
+              </a:rPr>
+              <a:t>  54  </a:t>
+            </a:r>
+            <a:r>
+              <a:rPr sz="1400">
+                <a:solidFill>
+                  <a:srgbClr val="DCECEF"/>
+                </a:solidFill>
+                <a:latin typeface="Consolas"/>
+              </a:rPr>
+              <a:t>    })</a:t>
+            </a:r>
+          </a:p>
+          <a:p>
+            <a:pPr>
+              <a:spcAft>
+                <a:spcPts val="0"/>
+              </a:spcAft>
+            </a:pPr>
+            <a:r>
+              <a:rPr sz="1400">
+                <a:solidFill>
+                  <a:srgbClr val="6D8C97"/>
+                </a:solidFill>
+                <a:latin typeface="Consolas"/>
+              </a:rPr>
+              <a:t>  55  </a:t>
+            </a:r>
+            <a:r>
+              <a:rPr sz="1400">
+                <a:solidFill>
+                  <a:srgbClr val="DCECEF"/>
+                </a:solidFill>
+                <a:latin typeface="Consolas"/>
+              </a:rPr>
+              <a:t>  });</a:t>
+            </a:r>
+          </a:p>
+          <a:p>
+            <a:pPr>
+              <a:spcAft>
+                <a:spcPts val="0"/>
+              </a:spcAft>
+            </a:pPr>
+            <a:r>
+              <a:rPr sz="1400">
+                <a:solidFill>
+                  <a:srgbClr val="6D8C97"/>
+                </a:solidFill>
+                <a:latin typeface="Consolas"/>
+              </a:rPr>
+              <a:t>  56  </a:t>
+            </a:r>
+            <a:r>
+              <a:rPr sz="1400">
+                <a:solidFill>
+                  <a:srgbClr val="7FE0A0"/>
+                </a:solidFill>
+                <a:latin typeface="Consolas"/>
+              </a:rPr>
+              <a:t> </a:t>
+            </a:r>
+          </a:p>
+          <a:p>
+            <a:pPr>
+              <a:spcAft>
+                <a:spcPts val="0"/>
+              </a:spcAft>
+            </a:pPr>
+            <a:r>
+              <a:rPr sz="1400">
+                <a:solidFill>
+                  <a:srgbClr val="6D8C97"/>
+                </a:solidFill>
+                <a:latin typeface="Consolas"/>
+              </a:rPr>
+              <a:t>  57  </a:t>
+            </a:r>
+            <a:r>
+              <a:rPr sz="1400">
+                <a:solidFill>
+                  <a:srgbClr val="7FE0A0"/>
+                </a:solidFill>
+                <a:latin typeface="Consolas"/>
+              </a:rPr>
+              <a:t>  // Week 5: fetch does NOT throw when the server says no. A 429 arrives</a:t>
+            </a:r>
+          </a:p>
+          <a:p>
+            <a:pPr>
+              <a:spcAft>
+                <a:spcPts val="0"/>
+              </a:spcAft>
+            </a:pPr>
+            <a:r>
+              <a:rPr sz="1400">
+                <a:solidFill>
+                  <a:srgbClr val="6D8C97"/>
+                </a:solidFill>
+                <a:latin typeface="Consolas"/>
+              </a:rPr>
+              <a:t>  58  </a:t>
+            </a:r>
+            <a:r>
+              <a:rPr sz="1400">
+                <a:solidFill>
+                  <a:srgbClr val="7FE0A0"/>
+                </a:solidFill>
+                <a:latin typeface="Consolas"/>
+              </a:rPr>
+              <a:t>  // looking just like a success until you actually check.</a:t>
+            </a:r>
+          </a:p>
+          <a:p>
+            <a:pPr>
+              <a:spcAft>
+                <a:spcPts val="0"/>
+              </a:spcAft>
+            </a:pPr>
+            <a:r>
+              <a:rPr sz="1400">
+                <a:solidFill>
+                  <a:srgbClr val="6D8C97"/>
+                </a:solidFill>
+                <a:latin typeface="Consolas"/>
+              </a:rPr>
+              <a:t>  59  </a:t>
+            </a:r>
+            <a:r>
+              <a:rPr sz="1400">
+                <a:solidFill>
+                  <a:srgbClr val="7FE0A0"/>
+                </a:solidFill>
+                <a:latin typeface="Consolas"/>
+              </a:rPr>
+              <a:t>  if (!res.ok) {</a:t>
+            </a:r>
+          </a:p>
+          <a:p>
+            <a:pPr>
+              <a:spcAft>
+                <a:spcPts val="0"/>
+              </a:spcAft>
+            </a:pPr>
+            <a:r>
+              <a:rPr sz="1400">
+                <a:solidFill>
+                  <a:srgbClr val="6D8C97"/>
+                </a:solidFill>
+                <a:latin typeface="Consolas"/>
+              </a:rPr>
+              <a:t>  60  </a:t>
+            </a:r>
+            <a:r>
+              <a:rPr sz="1400">
+                <a:solidFill>
+                  <a:srgbClr val="7FE0A0"/>
+                </a:solidFill>
+                <a:latin typeface="Consolas"/>
+              </a:rPr>
+              <a:t>    const problem = await res.json();</a:t>
+            </a:r>
+          </a:p>
+          <a:p>
+            <a:pPr>
+              <a:spcAft>
+                <a:spcPts val="0"/>
+              </a:spcAft>
+            </a:pPr>
+            <a:r>
+              <a:rPr sz="1400">
+                <a:solidFill>
+                  <a:srgbClr val="6D8C97"/>
+                </a:solidFill>
+                <a:latin typeface="Consolas"/>
+              </a:rPr>
+              <a:t>  61  </a:t>
+            </a:r>
+            <a:r>
+              <a:rPr sz="1400">
+                <a:solidFill>
+                  <a:srgbClr val="7FE0A0"/>
+                </a:solidFill>
+                <a:latin typeface="Consolas"/>
+              </a:rPr>
+              <a:t>    throw new Error(explain(res.status, problem));</a:t>
+            </a:r>
+          </a:p>
+          <a:p>
+            <a:pPr>
+              <a:spcAft>
+                <a:spcPts val="0"/>
+              </a:spcAft>
+            </a:pPr>
+            <a:r>
+              <a:rPr sz="1400">
+                <a:solidFill>
+                  <a:srgbClr val="6D8C97"/>
+                </a:solidFill>
+                <a:latin typeface="Consolas"/>
+              </a:rPr>
+              <a:t>  62  </a:t>
+            </a:r>
+            <a:r>
+              <a:rPr sz="1400">
+                <a:solidFill>
+                  <a:srgbClr val="7FE0A0"/>
+                </a:solidFill>
+                <a:latin typeface="Consolas"/>
+              </a:rPr>
+              <a:t>  }</a:t>
+            </a:r>
+          </a:p>
+          <a:p>
+            <a:pPr>
+              <a:spcAft>
+                <a:spcPts val="0"/>
+              </a:spcAft>
+            </a:pPr>
+            <a:r>
+              <a:rPr sz="1400">
+                <a:solidFill>
+                  <a:srgbClr val="6D8C97"/>
+                </a:solidFill>
+                <a:latin typeface="Consolas"/>
+              </a:rPr>
+              <a:t>  63  </a:t>
+            </a:r>
+            <a:r>
+              <a:rPr sz="1400">
+                <a:solidFill>
+                  <a:srgbClr val="7FE0A0"/>
+                </a:solidFill>
+                <a:latin typeface="Consolas"/>
+              </a:rPr>
+              <a:t> </a:t>
+            </a:r>
+          </a:p>
+          <a:p>
+            <a:pPr>
+              <a:spcAft>
+                <a:spcPts val="0"/>
+              </a:spcAft>
+            </a:pPr>
+            <a:r>
+              <a:rPr sz="1400">
+                <a:solidFill>
+                  <a:srgbClr val="6D8C97"/>
+                </a:solidFill>
+                <a:latin typeface="Consolas"/>
+              </a:rPr>
+              <a:t>  64  </a:t>
+            </a:r>
+            <a:r>
+              <a:rPr sz="1400">
+                <a:solidFill>
+                  <a:srgbClr val="DCECEF"/>
+                </a:solidFill>
+                <a:latin typeface="Consolas"/>
+              </a:rPr>
+              <a:t>  const data = await res.json();</a:t>
+            </a:r>
+          </a:p>
+          <a:p>
+            <a:pPr>
+              <a:spcAft>
+                <a:spcPts val="0"/>
+              </a:spcAft>
+            </a:pPr>
+            <a:r>
+              <a:rPr sz="1400">
+                <a:solidFill>
+                  <a:srgbClr val="6D8C97"/>
+                </a:solidFill>
+                <a:latin typeface="Consolas"/>
+              </a:rPr>
+              <a:t>  65  </a:t>
+            </a:r>
+            <a:r>
+              <a:rPr sz="1400">
+                <a:solidFill>
+                  <a:srgbClr val="DCECEF"/>
+                </a:solidFill>
+                <a:latin typeface="Consolas"/>
+              </a:rPr>
+              <a:t>  return data.choices[0].message.content;</a:t>
+            </a:r>
+          </a:p>
+          <a:p>
+            <a:pPr>
+              <a:spcAft>
+                <a:spcPts val="0"/>
+              </a:spcAft>
+            </a:pPr>
+            <a:r>
+              <a:rPr sz="1400">
+                <a:solidFill>
+                  <a:srgbClr val="6D8C97"/>
+                </a:solidFill>
+                <a:latin typeface="Consolas"/>
+              </a:rPr>
+              <a:t>  66  </a:t>
+            </a:r>
+            <a:r>
+              <a:rPr sz="1400">
+                <a:solidFill>
+                  <a:srgbClr val="DCECEF"/>
+                </a:solidFill>
+                <a:latin typeface="Consolas"/>
+              </a:rPr>
+              <a:t>}</a:t>
+            </a:r>
+          </a:p>
+        </p:txBody>
+      </p:sp>
+    </p:spTree>
+  </p:cSld>
+  <p:clrMapOvr>
+    <a:masterClrMapping/>
+  </p:clrMapOvr>
+</p:sld>
+</file>
+
+<file path=ppt/slides/slide8.xml><?xml version="1.0" encoding="utf-8"?>
+<p:sld xmlns:a="http://schemas.openxmlformats.org/drawingml/2006/main" xmlns:p="http://schemas.openxmlformats.org/presentationml/2006/main" xmlns:r="http://schemas.openxmlformats.org/officeDocument/2006/relationships">
+  <p:cSld>
+    <p:bg>
+      <p:bgPr>
+        <a:solidFill>
+          <a:srgbClr val="102127"/>
+        </a:solidFill>
+        <a:effectLst/>
+      </p:bgPr>
+    </p:bg>
+    <p:spTree>
+      <p:nvGrpSpPr>
+        <p:cNvPr id="1" name=""/>
+        <p:cNvGrpSpPr/>
+        <p:nvPr/>
+      </p:nvGrpSpPr>
+      <p:grpSpPr/>
+      <p:sp>
+        <p:nvSpPr>
+          <p:cNvPr id="2" name="TextBox 1"/>
+          <p:cNvSpPr txBox="1"/>
+          <p:nvPr/>
+        </p:nvSpPr>
+        <p:spPr>
+          <a:xfrm>
+            <a:off x="502920" y="274320"/>
+            <a:ext cx="11155680" cy="731520"/>
+          </a:xfrm>
+          <a:prstGeom prst="rect">
+            <a:avLst/>
+          </a:prstGeom>
+          <a:noFill/>
+        </p:spPr>
+        <p:txBody>
+          <a:bodyPr wrap="none">
+            <a:spAutoFit/>
+          </a:bodyPr>
+          <a:lstStyle/>
+          <a:p>
+            <a:r>
+              <a:rPr sz="2600" b="1">
+                <a:solidFill>
+                  <a:srgbClr val="01AEFD"/>
+                </a:solidFill>
+              </a:rPr>
+              <a:t>Type this into script.js  (3 of 3)</a:t>
+            </a:r>
+          </a:p>
+        </p:txBody>
+      </p:sp>
+      <p:sp>
+        <p:nvSpPr>
+          <p:cNvPr id="3" name="TextBox 2"/>
+          <p:cNvSpPr txBox="1"/>
+          <p:nvPr/>
+        </p:nvSpPr>
+        <p:spPr>
+          <a:xfrm>
+            <a:off x="502920" y="1051560"/>
+            <a:ext cx="11155680" cy="5394960"/>
+          </a:xfrm>
+          <a:prstGeom prst="rect">
+            <a:avLst/>
+          </a:prstGeom>
+          <a:noFill/>
+        </p:spPr>
+        <p:txBody>
+          <a:bodyPr wrap="none">
+            <a:spAutoFit/>
+          </a:bodyPr>
+          <a:lstStyle/>
+          <a:p>
+            <a:pPr>
+              <a:spcAft>
+                <a:spcPts val="0"/>
+              </a:spcAft>
+            </a:pPr>
+            <a:r>
+              <a:rPr sz="1700">
+                <a:solidFill>
+                  <a:srgbClr val="6D8C97"/>
+                </a:solidFill>
+                <a:latin typeface="Consolas"/>
+              </a:rPr>
+              <a:t>  21  </a:t>
+            </a:r>
+            <a:r>
+              <a:rPr sz="1700">
+                <a:solidFill>
+                  <a:srgbClr val="7FE0A0"/>
+                </a:solidFill>
+                <a:latin typeface="Consolas"/>
+              </a:rPr>
+              <a:t> </a:t>
+            </a:r>
+          </a:p>
+          <a:p>
+            <a:pPr>
+              <a:spcAft>
+                <a:spcPts val="0"/>
+              </a:spcAft>
+            </a:pPr>
+            <a:r>
+              <a:rPr sz="1700">
+                <a:solidFill>
+                  <a:srgbClr val="6D8C97"/>
+                </a:solidFill>
+                <a:latin typeface="Consolas"/>
+              </a:rPr>
+              <a:t>  22  </a:t>
+            </a:r>
+            <a:r>
+              <a:rPr sz="1700">
+                <a:solidFill>
+                  <a:srgbClr val="7FE0A0"/>
+                </a:solidFill>
+                <a:latin typeface="Consolas"/>
+              </a:rPr>
+              <a:t>// Turn a status number into a sentence a person can act on.</a:t>
+            </a:r>
+          </a:p>
+          <a:p>
+            <a:pPr>
+              <a:spcAft>
+                <a:spcPts val="0"/>
+              </a:spcAft>
+            </a:pPr>
+            <a:r>
+              <a:rPr sz="1700">
+                <a:solidFill>
+                  <a:srgbClr val="6D8C97"/>
+                </a:solidFill>
+                <a:latin typeface="Consolas"/>
+              </a:rPr>
+              <a:t>  23  </a:t>
+            </a:r>
+            <a:r>
+              <a:rPr sz="1700">
+                <a:solidFill>
+                  <a:srgbClr val="7FE0A0"/>
+                </a:solidFill>
+                <a:latin typeface="Consolas"/>
+              </a:rPr>
+              <a:t>function explain(status, problem) {</a:t>
+            </a:r>
+          </a:p>
+          <a:p>
+            <a:pPr>
+              <a:spcAft>
+                <a:spcPts val="0"/>
+              </a:spcAft>
+            </a:pPr>
+            <a:r>
+              <a:rPr sz="1700">
+                <a:solidFill>
+                  <a:srgbClr val="6D8C97"/>
+                </a:solidFill>
+                <a:latin typeface="Consolas"/>
+              </a:rPr>
+              <a:t>  24  </a:t>
+            </a:r>
+            <a:r>
+              <a:rPr sz="1700">
+                <a:solidFill>
+                  <a:srgbClr val="7FE0A0"/>
+                </a:solidFill>
+                <a:latin typeface="Consolas"/>
+              </a:rPr>
+              <a:t>  if (status === 401) { return 'The server does not recognise your key. Check it for typos.'; }</a:t>
+            </a:r>
+          </a:p>
+          <a:p>
+            <a:pPr>
+              <a:spcAft>
+                <a:spcPts val="0"/>
+              </a:spcAft>
+            </a:pPr>
+            <a:r>
+              <a:rPr sz="1700">
+                <a:solidFill>
+                  <a:srgbClr val="6D8C97"/>
+                </a:solidFill>
+                <a:latin typeface="Consolas"/>
+              </a:rPr>
+              <a:t>  25  </a:t>
+            </a:r>
+            <a:r>
+              <a:rPr sz="1700">
+                <a:solidFill>
+                  <a:srgbClr val="7FE0A0"/>
+                </a:solidFill>
+                <a:latin typeface="Consolas"/>
+              </a:rPr>
+              <a:t>  if (status === 429) { return 'You are sending too fast. Wait a few seconds and try again.'; }</a:t>
+            </a:r>
+          </a:p>
+          <a:p>
+            <a:pPr>
+              <a:spcAft>
+                <a:spcPts val="0"/>
+              </a:spcAft>
+            </a:pPr>
+            <a:r>
+              <a:rPr sz="1700">
+                <a:solidFill>
+                  <a:srgbClr val="6D8C97"/>
+                </a:solidFill>
+                <a:latin typeface="Consolas"/>
+              </a:rPr>
+              <a:t>  26  </a:t>
+            </a:r>
+            <a:r>
+              <a:rPr sz="1700">
+                <a:solidFill>
+                  <a:srgbClr val="7FE0A0"/>
+                </a:solidFill>
+                <a:latin typeface="Consolas"/>
+              </a:rPr>
+              <a:t>  if (status === 400) { return 'The server could not use that request: ' + problem.error.message; }</a:t>
+            </a:r>
+          </a:p>
+          <a:p>
+            <a:pPr>
+              <a:spcAft>
+                <a:spcPts val="0"/>
+              </a:spcAft>
+            </a:pPr>
+            <a:r>
+              <a:rPr sz="1700">
+                <a:solidFill>
+                  <a:srgbClr val="6D8C97"/>
+                </a:solidFill>
+                <a:latin typeface="Consolas"/>
+              </a:rPr>
+              <a:t>  27  </a:t>
+            </a:r>
+            <a:r>
+              <a:rPr sz="1700">
+                <a:solidFill>
+                  <a:srgbClr val="7FE0A0"/>
+                </a:solidFill>
+                <a:latin typeface="Consolas"/>
+              </a:rPr>
+              <a:t>  return 'Something went wrong on the server (' + status + '). Try again in a moment.';</a:t>
+            </a:r>
+          </a:p>
+          <a:p>
+            <a:pPr>
+              <a:spcAft>
+                <a:spcPts val="0"/>
+              </a:spcAft>
+            </a:pPr>
+            <a:r>
+              <a:rPr sz="1700">
+                <a:solidFill>
+                  <a:srgbClr val="6D8C97"/>
+                </a:solidFill>
+                <a:latin typeface="Consolas"/>
+              </a:rPr>
+              <a:t>  28  </a:t>
+            </a:r>
+            <a:r>
+              <a:rPr sz="1700">
+                <a:solidFill>
+                  <a:srgbClr val="DCECEF"/>
+                </a:solidFill>
+                <a:latin typeface="Consolas"/>
+              </a:rPr>
+              <a:t>}</a:t>
+            </a:r>
+          </a:p>
+        </p:txBody>
+      </p:sp>
+    </p:spTree>
+  </p:cSld>
+  <p:clrMapOvr>
+    <a:masterClrMapping/>
+  </p:clrMapOvr>
+</p:sld>
+</file>
+
+<file path=ppt/slides/slide9.xml><?xml version="1.0" encoding="utf-8"?>
+<p:sld xmlns:a="http://schemas.openxmlformats.org/drawingml/2006/main" xmlns:p="http://schemas.openxmlformats.org/presentationml/2006/main" xmlns:r="http://schemas.openxmlformats.org/officeDocument/2006/relationships">
+  <p:cSld>
+    <p:spTree>
+      <p:nvGrpSpPr>
+        <p:cNvPr id="1" name=""/>
+        <p:cNvGrpSpPr/>
+        <p:nvPr/>
+      </p:nvGrpSpPr>
+      <p:grpSpPr/>
+      <p:sp>
+        <p:nvSpPr>
           <p:cNvPr id="2" name="Title 1"/>
           <p:cNvSpPr>
             <a:spLocks noGrp="1"/>
@@ -3787,7 +5660,7 @@
                   <a:srgbClr val="1F2A37"/>
                 </a:solidFill>
               </a:rPr>
-              <a:t>40 requests a minute</a:t>
+              <a:t>try and catch</a:t>
             </a:r>
           </a:p>
         </p:txBody>
@@ -3820,12 +5693,12 @@
               </a:spcAft>
             </a:pPr>
             <a:r>
-              <a:rPr sz="2800">
-                <a:solidFill>
-                  <a:srgbClr val="01AEFD"/>
-                </a:solidFill>
-              </a:rPr>
-              <a:t>One graphics card, fifteen of you</a:t>
+              <a:rPr sz="2400">
+                <a:solidFill>
+                  <a:srgbClr val="1F2A37"/>
+                </a:solidFill>
+              </a:rPr>
+              <a:t>• try - attempt this</a:t>
             </a:r>
           </a:p>
           <a:p>
@@ -3840,7 +5713,7 @@
                   <a:srgbClr val="1F2A37"/>
                 </a:solidFill>
               </a:rPr>
-              <a:t>• It is a queue, not a punishment</a:t>
+              <a:t>• catch - it shouted; here is what the user sees</a:t>
             </a:r>
           </a:p>
           <a:p>
@@ -3855,7 +5728,7 @@
                   <a:srgbClr val="1F2A37"/>
                 </a:solidFill>
               </a:rPr>
-              <a:t>• Good software waits politely</a:t>
+              <a:t>• Without it, failure looks like nothing happening</a:t>
             </a:r>
           </a:p>
         </p:txBody>

--- a/ai101/slides/week-05.pptx
+++ b/ai101/slides/week-05.pptx
@@ -3257,7 +3257,7 @@
                 </a:solidFill>
                 <a:latin typeface="Consolas"/>
               </a:rPr>
-              <a:t>  67  </a:t>
+              <a:t>  70  </a:t>
             </a:r>
             <a:r>
               <a:rPr sz="1400">
@@ -3282,7 +3282,7 @@
                 </a:solidFill>
                 <a:latin typeface="Consolas"/>
               </a:rPr>
-              <a:t>  68  </a:t>
+              <a:t>  71  </a:t>
             </a:r>
             <a:r>
               <a:rPr sz="1400">
@@ -3307,7 +3307,7 @@
                 </a:solidFill>
                 <a:latin typeface="Consolas"/>
               </a:rPr>
-              <a:t>  69  </a:t>
+              <a:t>  72  </a:t>
             </a:r>
             <a:r>
               <a:rPr sz="1400">
@@ -3332,7 +3332,7 @@
                 </a:solidFill>
                 <a:latin typeface="Consolas"/>
               </a:rPr>
-              <a:t>  70  </a:t>
+              <a:t>  73  </a:t>
             </a:r>
             <a:r>
               <a:rPr sz="1400">
@@ -3357,7 +3357,7 @@
                 </a:solidFill>
                 <a:latin typeface="Consolas"/>
               </a:rPr>
-              <a:t>  71  </a:t>
+              <a:t>  74  </a:t>
             </a:r>
             <a:r>
               <a:rPr sz="1400">
@@ -3382,7 +3382,7 @@
                 </a:solidFill>
                 <a:latin typeface="Consolas"/>
               </a:rPr>
-              <a:t>  72  </a:t>
+              <a:t>  75  </a:t>
             </a:r>
             <a:r>
               <a:rPr sz="1400">
@@ -3407,7 +3407,7 @@
                 </a:solidFill>
                 <a:latin typeface="Consolas"/>
               </a:rPr>
-              <a:t>  73  </a:t>
+              <a:t>  76  </a:t>
             </a:r>
             <a:r>
               <a:rPr sz="1400">
@@ -3432,7 +3432,7 @@
                 </a:solidFill>
                 <a:latin typeface="Consolas"/>
               </a:rPr>
-              <a:t>  74  </a:t>
+              <a:t>  77  </a:t>
             </a:r>
             <a:r>
               <a:rPr sz="1400">
@@ -3457,7 +3457,7 @@
                 </a:solidFill>
                 <a:latin typeface="Consolas"/>
               </a:rPr>
-              <a:t>  75  </a:t>
+              <a:t>  78  </a:t>
             </a:r>
             <a:r>
               <a:rPr sz="1400">
@@ -3482,7 +3482,7 @@
                 </a:solidFill>
                 <a:latin typeface="Consolas"/>
               </a:rPr>
-              <a:t>  76  </a:t>
+              <a:t>  79  </a:t>
             </a:r>
             <a:r>
               <a:rPr sz="1400">
@@ -3507,7 +3507,7 @@
                 </a:solidFill>
                 <a:latin typeface="Consolas"/>
               </a:rPr>
-              <a:t>  77  </a:t>
+              <a:t>  80  </a:t>
             </a:r>
             <a:r>
               <a:rPr sz="1400">
@@ -3532,7 +3532,7 @@
                 </a:solidFill>
                 <a:latin typeface="Consolas"/>
               </a:rPr>
-              <a:t>  78  </a:t>
+              <a:t>  81  </a:t>
             </a:r>
             <a:r>
               <a:rPr sz="1400">
@@ -3557,7 +3557,7 @@
                 </a:solidFill>
                 <a:latin typeface="Consolas"/>
               </a:rPr>
-              <a:t>  79  </a:t>
+              <a:t>  82  </a:t>
             </a:r>
             <a:r>
               <a:rPr sz="1400">
@@ -3582,7 +3582,7 @@
                 </a:solidFill>
                 <a:latin typeface="Consolas"/>
               </a:rPr>
-              <a:t>  80  </a:t>
+              <a:t>  83  </a:t>
             </a:r>
             <a:r>
               <a:rPr sz="1400">
@@ -3607,7 +3607,7 @@
                 </a:solidFill>
                 <a:latin typeface="Consolas"/>
               </a:rPr>
-              <a:t>  81  </a:t>
+              <a:t>  84  </a:t>
             </a:r>
             <a:r>
               <a:rPr sz="1400">
@@ -3714,7 +3714,7 @@
                 </a:solidFill>
                 <a:latin typeface="Consolas"/>
               </a:rPr>
-              <a:t>  82  </a:t>
+              <a:t>  85  </a:t>
             </a:r>
             <a:r>
               <a:rPr sz="1700">
@@ -3739,7 +3739,7 @@
                 </a:solidFill>
                 <a:latin typeface="Consolas"/>
               </a:rPr>
-              <a:t>  83  </a:t>
+              <a:t>  86  </a:t>
             </a:r>
             <a:r>
               <a:rPr sz="1700">
@@ -3764,7 +3764,7 @@
                 </a:solidFill>
                 <a:latin typeface="Consolas"/>
               </a:rPr>
-              <a:t>  84  </a:t>
+              <a:t>  87  </a:t>
             </a:r>
             <a:r>
               <a:rPr sz="1700">
@@ -4568,7 +4568,7 @@
                 </a:solidFill>
                 <a:latin typeface="Consolas"/>
               </a:rPr>
-              <a:t>  39  </a:t>
+              <a:t>  42  </a:t>
             </a:r>
             <a:r>
               <a:rPr sz="1400">
@@ -4593,7 +4593,7 @@
                 </a:solidFill>
                 <a:latin typeface="Consolas"/>
               </a:rPr>
-              <a:t>  40  </a:t>
+              <a:t>  43  </a:t>
             </a:r>
             <a:r>
               <a:rPr sz="1400">
@@ -4618,7 +4618,7 @@
                 </a:solidFill>
                 <a:latin typeface="Consolas"/>
               </a:rPr>
-              <a:t>  41  </a:t>
+              <a:t>  44  </a:t>
             </a:r>
             <a:r>
               <a:rPr sz="1400">
@@ -4643,7 +4643,7 @@
                 </a:solidFill>
                 <a:latin typeface="Consolas"/>
               </a:rPr>
-              <a:t>  42  </a:t>
+              <a:t>  45  </a:t>
             </a:r>
             <a:r>
               <a:rPr sz="1400">
@@ -4668,7 +4668,7 @@
                 </a:solidFill>
                 <a:latin typeface="Consolas"/>
               </a:rPr>
-              <a:t>  43  </a:t>
+              <a:t>  46  </a:t>
             </a:r>
             <a:r>
               <a:rPr sz="1400">
@@ -4693,7 +4693,7 @@
                 </a:solidFill>
                 <a:latin typeface="Consolas"/>
               </a:rPr>
-              <a:t>  44  </a:t>
+              <a:t>  47  </a:t>
             </a:r>
             <a:r>
               <a:rPr sz="1400">
@@ -4718,7 +4718,7 @@
                 </a:solidFill>
                 <a:latin typeface="Consolas"/>
               </a:rPr>
-              <a:t>  45  </a:t>
+              <a:t>  48  </a:t>
             </a:r>
             <a:r>
               <a:rPr sz="1400">
@@ -4743,7 +4743,7 @@
                 </a:solidFill>
                 <a:latin typeface="Consolas"/>
               </a:rPr>
-              <a:t>  46  </a:t>
+              <a:t>  49  </a:t>
             </a:r>
             <a:r>
               <a:rPr sz="1400">
@@ -4768,7 +4768,7 @@
                 </a:solidFill>
                 <a:latin typeface="Consolas"/>
               </a:rPr>
-              <a:t>  47  </a:t>
+              <a:t>  50  </a:t>
             </a:r>
             <a:r>
               <a:rPr sz="1400">
@@ -4793,7 +4793,7 @@
                 </a:solidFill>
                 <a:latin typeface="Consolas"/>
               </a:rPr>
-              <a:t>  48  </a:t>
+              <a:t>  51  </a:t>
             </a:r>
             <a:r>
               <a:rPr sz="1400">
@@ -4818,7 +4818,7 @@
                 </a:solidFill>
                 <a:latin typeface="Consolas"/>
               </a:rPr>
-              <a:t>  49  </a:t>
+              <a:t>  52  </a:t>
             </a:r>
             <a:r>
               <a:rPr sz="1400">
@@ -4843,7 +4843,7 @@
                 </a:solidFill>
                 <a:latin typeface="Consolas"/>
               </a:rPr>
-              <a:t>  50  </a:t>
+              <a:t>  53  </a:t>
             </a:r>
             <a:r>
               <a:rPr sz="1400">
@@ -4868,7 +4868,7 @@
                 </a:solidFill>
                 <a:latin typeface="Consolas"/>
               </a:rPr>
-              <a:t>  51  </a:t>
+              <a:t>  54  </a:t>
             </a:r>
             <a:r>
               <a:rPr sz="1400">
@@ -4893,7 +4893,7 @@
                 </a:solidFill>
                 <a:latin typeface="Consolas"/>
               </a:rPr>
-              <a:t>  52  </a:t>
+              <a:t>  55  </a:t>
             </a:r>
             <a:r>
               <a:rPr sz="1400">
@@ -4918,7 +4918,7 @@
                 </a:solidFill>
                 <a:latin typeface="Consolas"/>
               </a:rPr>
-              <a:t>  53  </a:t>
+              <a:t>  56  </a:t>
             </a:r>
             <a:r>
               <a:rPr sz="1400">
@@ -5025,7 +5025,7 @@
                 </a:solidFill>
                 <a:latin typeface="Consolas"/>
               </a:rPr>
-              <a:t>  54  </a:t>
+              <a:t>  57  </a:t>
             </a:r>
             <a:r>
               <a:rPr sz="1400">
@@ -5050,7 +5050,7 @@
                 </a:solidFill>
                 <a:latin typeface="Consolas"/>
               </a:rPr>
-              <a:t>  55  </a:t>
+              <a:t>  58  </a:t>
             </a:r>
             <a:r>
               <a:rPr sz="1400">
@@ -5075,7 +5075,7 @@
                 </a:solidFill>
                 <a:latin typeface="Consolas"/>
               </a:rPr>
-              <a:t>  56  </a:t>
+              <a:t>  59  </a:t>
             </a:r>
             <a:r>
               <a:rPr sz="1400">
@@ -5100,7 +5100,7 @@
                 </a:solidFill>
                 <a:latin typeface="Consolas"/>
               </a:rPr>
-              <a:t>  57  </a:t>
+              <a:t>  60  </a:t>
             </a:r>
             <a:r>
               <a:rPr sz="1400">
@@ -5125,7 +5125,7 @@
                 </a:solidFill>
                 <a:latin typeface="Consolas"/>
               </a:rPr>
-              <a:t>  58  </a:t>
+              <a:t>  61  </a:t>
             </a:r>
             <a:r>
               <a:rPr sz="1400">
@@ -5150,7 +5150,7 @@
                 </a:solidFill>
                 <a:latin typeface="Consolas"/>
               </a:rPr>
-              <a:t>  59  </a:t>
+              <a:t>  62  </a:t>
             </a:r>
             <a:r>
               <a:rPr sz="1400">
@@ -5175,7 +5175,7 @@
                 </a:solidFill>
                 <a:latin typeface="Consolas"/>
               </a:rPr>
-              <a:t>  60  </a:t>
+              <a:t>  63  </a:t>
             </a:r>
             <a:r>
               <a:rPr sz="1400">
@@ -5200,7 +5200,7 @@
                 </a:solidFill>
                 <a:latin typeface="Consolas"/>
               </a:rPr>
-              <a:t>  61  </a:t>
+              <a:t>  64  </a:t>
             </a:r>
             <a:r>
               <a:rPr sz="1400">
@@ -5225,7 +5225,7 @@
                 </a:solidFill>
                 <a:latin typeface="Consolas"/>
               </a:rPr>
-              <a:t>  62  </a:t>
+              <a:t>  65  </a:t>
             </a:r>
             <a:r>
               <a:rPr sz="1400">
@@ -5250,7 +5250,7 @@
                 </a:solidFill>
                 <a:latin typeface="Consolas"/>
               </a:rPr>
-              <a:t>  63  </a:t>
+              <a:t>  66  </a:t>
             </a:r>
             <a:r>
               <a:rPr sz="1400">
@@ -5275,7 +5275,7 @@
                 </a:solidFill>
                 <a:latin typeface="Consolas"/>
               </a:rPr>
-              <a:t>  64  </a:t>
+              <a:t>  67  </a:t>
             </a:r>
             <a:r>
               <a:rPr sz="1400">
@@ -5300,7 +5300,7 @@
                 </a:solidFill>
                 <a:latin typeface="Consolas"/>
               </a:rPr>
-              <a:t>  65  </a:t>
+              <a:t>  68  </a:t>
             </a:r>
             <a:r>
               <a:rPr sz="1400">
@@ -5325,7 +5325,7 @@
                 </a:solidFill>
                 <a:latin typeface="Consolas"/>
               </a:rPr>
-              <a:t>  66  </a:t>
+              <a:t>  69  </a:t>
             </a:r>
             <a:r>
               <a:rPr sz="1400">
@@ -5432,7 +5432,7 @@
                 </a:solidFill>
                 <a:latin typeface="Consolas"/>
               </a:rPr>
-              <a:t>  21  </a:t>
+              <a:t>  24  </a:t>
             </a:r>
             <a:r>
               <a:rPr sz="1700">
@@ -5457,7 +5457,7 @@
                 </a:solidFill>
                 <a:latin typeface="Consolas"/>
               </a:rPr>
-              <a:t>  22  </a:t>
+              <a:t>  25  </a:t>
             </a:r>
             <a:r>
               <a:rPr sz="1700">
@@ -5482,7 +5482,7 @@
                 </a:solidFill>
                 <a:latin typeface="Consolas"/>
               </a:rPr>
-              <a:t>  23  </a:t>
+              <a:t>  26  </a:t>
             </a:r>
             <a:r>
               <a:rPr sz="1700">
@@ -5507,7 +5507,7 @@
                 </a:solidFill>
                 <a:latin typeface="Consolas"/>
               </a:rPr>
-              <a:t>  24  </a:t>
+              <a:t>  27  </a:t>
             </a:r>
             <a:r>
               <a:rPr sz="1700">
@@ -5532,7 +5532,7 @@
                 </a:solidFill>
                 <a:latin typeface="Consolas"/>
               </a:rPr>
-              <a:t>  25  </a:t>
+              <a:t>  28  </a:t>
             </a:r>
             <a:r>
               <a:rPr sz="1700">
@@ -5557,7 +5557,7 @@
                 </a:solidFill>
                 <a:latin typeface="Consolas"/>
               </a:rPr>
-              <a:t>  26  </a:t>
+              <a:t>  29  </a:t>
             </a:r>
             <a:r>
               <a:rPr sz="1700">
@@ -5582,7 +5582,7 @@
                 </a:solidFill>
                 <a:latin typeface="Consolas"/>
               </a:rPr>
-              <a:t>  27  </a:t>
+              <a:t>  30  </a:t>
             </a:r>
             <a:r>
               <a:rPr sz="1700">
@@ -5607,7 +5607,7 @@
                 </a:solidFill>
                 <a:latin typeface="Consolas"/>
               </a:rPr>
-              <a:t>  28  </a:t>
+              <a:t>  31  </a:t>
             </a:r>
             <a:r>
               <a:rPr sz="1700">

--- a/ai101/slides/week-05.pptx
+++ b/ai101/slides/week-05.pptx
@@ -3257,7 +3257,7 @@
                 </a:solidFill>
                 <a:latin typeface="Consolas"/>
               </a:rPr>
-              <a:t>  70  </a:t>
+              <a:t>  78  </a:t>
             </a:r>
             <a:r>
               <a:rPr sz="1400">
@@ -3282,7 +3282,7 @@
                 </a:solidFill>
                 <a:latin typeface="Consolas"/>
               </a:rPr>
-              <a:t>  71  </a:t>
+              <a:t>  79  </a:t>
             </a:r>
             <a:r>
               <a:rPr sz="1400">
@@ -3307,7 +3307,7 @@
                 </a:solidFill>
                 <a:latin typeface="Consolas"/>
               </a:rPr>
-              <a:t>  72  </a:t>
+              <a:t>  80  </a:t>
             </a:r>
             <a:r>
               <a:rPr sz="1400">
@@ -3332,7 +3332,7 @@
                 </a:solidFill>
                 <a:latin typeface="Consolas"/>
               </a:rPr>
-              <a:t>  73  </a:t>
+              <a:t>  81  </a:t>
             </a:r>
             <a:r>
               <a:rPr sz="1400">
@@ -3357,7 +3357,7 @@
                 </a:solidFill>
                 <a:latin typeface="Consolas"/>
               </a:rPr>
-              <a:t>  74  </a:t>
+              <a:t>  82  </a:t>
             </a:r>
             <a:r>
               <a:rPr sz="1400">
@@ -3382,7 +3382,7 @@
                 </a:solidFill>
                 <a:latin typeface="Consolas"/>
               </a:rPr>
-              <a:t>  75  </a:t>
+              <a:t>  83  </a:t>
             </a:r>
             <a:r>
               <a:rPr sz="1400">
@@ -3407,7 +3407,7 @@
                 </a:solidFill>
                 <a:latin typeface="Consolas"/>
               </a:rPr>
-              <a:t>  76  </a:t>
+              <a:t>  84  </a:t>
             </a:r>
             <a:r>
               <a:rPr sz="1400">
@@ -3432,7 +3432,7 @@
                 </a:solidFill>
                 <a:latin typeface="Consolas"/>
               </a:rPr>
-              <a:t>  77  </a:t>
+              <a:t>  85  </a:t>
             </a:r>
             <a:r>
               <a:rPr sz="1400">
@@ -3457,7 +3457,7 @@
                 </a:solidFill>
                 <a:latin typeface="Consolas"/>
               </a:rPr>
-              <a:t>  78  </a:t>
+              <a:t>  86  </a:t>
             </a:r>
             <a:r>
               <a:rPr sz="1400">
@@ -3482,7 +3482,7 @@
                 </a:solidFill>
                 <a:latin typeface="Consolas"/>
               </a:rPr>
-              <a:t>  79  </a:t>
+              <a:t>  87  </a:t>
             </a:r>
             <a:r>
               <a:rPr sz="1400">
@@ -3507,7 +3507,7 @@
                 </a:solidFill>
                 <a:latin typeface="Consolas"/>
               </a:rPr>
-              <a:t>  80  </a:t>
+              <a:t>  88  </a:t>
             </a:r>
             <a:r>
               <a:rPr sz="1400">
@@ -3532,7 +3532,7 @@
                 </a:solidFill>
                 <a:latin typeface="Consolas"/>
               </a:rPr>
-              <a:t>  81  </a:t>
+              <a:t>  89  </a:t>
             </a:r>
             <a:r>
               <a:rPr sz="1400">
@@ -3557,7 +3557,7 @@
                 </a:solidFill>
                 <a:latin typeface="Consolas"/>
               </a:rPr>
-              <a:t>  82  </a:t>
+              <a:t>  90  </a:t>
             </a:r>
             <a:r>
               <a:rPr sz="1400">
@@ -3582,7 +3582,7 @@
                 </a:solidFill>
                 <a:latin typeface="Consolas"/>
               </a:rPr>
-              <a:t>  83  </a:t>
+              <a:t>  91  </a:t>
             </a:r>
             <a:r>
               <a:rPr sz="1400">
@@ -3607,7 +3607,7 @@
                 </a:solidFill>
                 <a:latin typeface="Consolas"/>
               </a:rPr>
-              <a:t>  84  </a:t>
+              <a:t>  92  </a:t>
             </a:r>
             <a:r>
               <a:rPr sz="1400">
@@ -3714,7 +3714,7 @@
                 </a:solidFill>
                 <a:latin typeface="Consolas"/>
               </a:rPr>
-              <a:t>  85  </a:t>
+              <a:t>  93  </a:t>
             </a:r>
             <a:r>
               <a:rPr sz="1700">
@@ -3723,7 +3723,7 @@
                 </a:solidFill>
                 <a:latin typeface="Consolas"/>
               </a:rPr>
-              <a:t>    addLine('Problem', problem.message);   // say what went wrong, out loud</a:t>
+              <a:t>    // 'Failed to fetch' means the request never arrived anywhere at all.</a:t>
             </a:r>
           </a:p>
           <a:p>
@@ -3739,7 +3739,7 @@
                 </a:solidFill>
                 <a:latin typeface="Consolas"/>
               </a:rPr>
-              <a:t>  86  </a:t>
+              <a:t>  94  </a:t>
             </a:r>
             <a:r>
               <a:rPr sz="1700">
@@ -3748,6 +3748,106 @@
                 </a:solidFill>
                 <a:latin typeface="Consolas"/>
               </a:rPr>
+              <a:t>    // It is the commonest real failure and the least useful wording there is.</a:t>
+            </a:r>
+          </a:p>
+          <a:p>
+            <a:pPr>
+              <a:spcAft>
+                <a:spcPts val="0"/>
+              </a:spcAft>
+            </a:pPr>
+            <a:r>
+              <a:rPr sz="1700">
+                <a:solidFill>
+                  <a:srgbClr val="6D8C97"/>
+                </a:solidFill>
+                <a:latin typeface="Consolas"/>
+              </a:rPr>
+              <a:t>  95  </a:t>
+            </a:r>
+            <a:r>
+              <a:rPr sz="1700">
+                <a:solidFill>
+                  <a:srgbClr val="7FE0A0"/>
+                </a:solidFill>
+                <a:latin typeface="Consolas"/>
+              </a:rPr>
+              <a:t>    addLine('Problem', problem.message === 'Failed to fetch'</a:t>
+            </a:r>
+          </a:p>
+          <a:p>
+            <a:pPr>
+              <a:spcAft>
+                <a:spcPts val="0"/>
+              </a:spcAft>
+            </a:pPr>
+            <a:r>
+              <a:rPr sz="1700">
+                <a:solidFill>
+                  <a:srgbClr val="6D8C97"/>
+                </a:solidFill>
+                <a:latin typeface="Consolas"/>
+              </a:rPr>
+              <a:t>  96  </a:t>
+            </a:r>
+            <a:r>
+              <a:rPr sz="1700">
+                <a:solidFill>
+                  <a:srgbClr val="7FE0A0"/>
+                </a:solidFill>
+                <a:latin typeface="Consolas"/>
+              </a:rPr>
+              <a:t>      ? 'Could not reach the AI. Are you on the school network?'</a:t>
+            </a:r>
+          </a:p>
+          <a:p>
+            <a:pPr>
+              <a:spcAft>
+                <a:spcPts val="0"/>
+              </a:spcAft>
+            </a:pPr>
+            <a:r>
+              <a:rPr sz="1700">
+                <a:solidFill>
+                  <a:srgbClr val="6D8C97"/>
+                </a:solidFill>
+                <a:latin typeface="Consolas"/>
+              </a:rPr>
+              <a:t>  97  </a:t>
+            </a:r>
+            <a:r>
+              <a:rPr sz="1700">
+                <a:solidFill>
+                  <a:srgbClr val="7FE0A0"/>
+                </a:solidFill>
+                <a:latin typeface="Consolas"/>
+              </a:rPr>
+              <a:t>      : problem.message);</a:t>
+            </a:r>
+          </a:p>
+          <a:p>
+            <a:pPr>
+              <a:spcAft>
+                <a:spcPts val="0"/>
+              </a:spcAft>
+            </a:pPr>
+            <a:r>
+              <a:rPr sz="1700">
+                <a:solidFill>
+                  <a:srgbClr val="6D8C97"/>
+                </a:solidFill>
+                <a:latin typeface="Consolas"/>
+              </a:rPr>
+              <a:t>  98  </a:t>
+            </a:r>
+            <a:r>
+              <a:rPr sz="1700">
+                <a:solidFill>
+                  <a:srgbClr val="7FE0A0"/>
+                </a:solidFill>
+                <a:latin typeface="Consolas"/>
+              </a:rPr>
               <a:t>  }</a:t>
             </a:r>
           </a:p>
@@ -3764,7 +3864,7 @@
                 </a:solidFill>
                 <a:latin typeface="Consolas"/>
               </a:rPr>
-              <a:t>  87  </a:t>
+              <a:t>  99  </a:t>
             </a:r>
             <a:r>
               <a:rPr sz="1700">
@@ -4568,7 +4668,7 @@
                 </a:solidFill>
                 <a:latin typeface="Consolas"/>
               </a:rPr>
-              <a:t>  42  </a:t>
+              <a:t>  50  </a:t>
             </a:r>
             <a:r>
               <a:rPr sz="1400">
@@ -4593,7 +4693,7 @@
                 </a:solidFill>
                 <a:latin typeface="Consolas"/>
               </a:rPr>
-              <a:t>  43  </a:t>
+              <a:t>  51  </a:t>
             </a:r>
             <a:r>
               <a:rPr sz="1400">
@@ -4618,7 +4718,7 @@
                 </a:solidFill>
                 <a:latin typeface="Consolas"/>
               </a:rPr>
-              <a:t>  44  </a:t>
+              <a:t>  52  </a:t>
             </a:r>
             <a:r>
               <a:rPr sz="1400">
@@ -4643,7 +4743,7 @@
                 </a:solidFill>
                 <a:latin typeface="Consolas"/>
               </a:rPr>
-              <a:t>  45  </a:t>
+              <a:t>  53  </a:t>
             </a:r>
             <a:r>
               <a:rPr sz="1400">
@@ -4668,7 +4768,7 @@
                 </a:solidFill>
                 <a:latin typeface="Consolas"/>
               </a:rPr>
-              <a:t>  46  </a:t>
+              <a:t>  54  </a:t>
             </a:r>
             <a:r>
               <a:rPr sz="1400">
@@ -4693,7 +4793,7 @@
                 </a:solidFill>
                 <a:latin typeface="Consolas"/>
               </a:rPr>
-              <a:t>  47  </a:t>
+              <a:t>  55  </a:t>
             </a:r>
             <a:r>
               <a:rPr sz="1400">
@@ -4718,7 +4818,7 @@
                 </a:solidFill>
                 <a:latin typeface="Consolas"/>
               </a:rPr>
-              <a:t>  48  </a:t>
+              <a:t>  56  </a:t>
             </a:r>
             <a:r>
               <a:rPr sz="1400">
@@ -4743,7 +4843,7 @@
                 </a:solidFill>
                 <a:latin typeface="Consolas"/>
               </a:rPr>
-              <a:t>  49  </a:t>
+              <a:t>  57  </a:t>
             </a:r>
             <a:r>
               <a:rPr sz="1400">
@@ -4768,7 +4868,7 @@
                 </a:solidFill>
                 <a:latin typeface="Consolas"/>
               </a:rPr>
-              <a:t>  50  </a:t>
+              <a:t>  58  </a:t>
             </a:r>
             <a:r>
               <a:rPr sz="1400">
@@ -4793,7 +4893,7 @@
                 </a:solidFill>
                 <a:latin typeface="Consolas"/>
               </a:rPr>
-              <a:t>  51  </a:t>
+              <a:t>  59  </a:t>
             </a:r>
             <a:r>
               <a:rPr sz="1400">
@@ -4818,7 +4918,7 @@
                 </a:solidFill>
                 <a:latin typeface="Consolas"/>
               </a:rPr>
-              <a:t>  52  </a:t>
+              <a:t>  60  </a:t>
             </a:r>
             <a:r>
               <a:rPr sz="1400">
@@ -4843,7 +4943,7 @@
                 </a:solidFill>
                 <a:latin typeface="Consolas"/>
               </a:rPr>
-              <a:t>  53  </a:t>
+              <a:t>  61  </a:t>
             </a:r>
             <a:r>
               <a:rPr sz="1400">
@@ -4868,7 +4968,7 @@
                 </a:solidFill>
                 <a:latin typeface="Consolas"/>
               </a:rPr>
-              <a:t>  54  </a:t>
+              <a:t>  62  </a:t>
             </a:r>
             <a:r>
               <a:rPr sz="1400">
@@ -4893,7 +4993,7 @@
                 </a:solidFill>
                 <a:latin typeface="Consolas"/>
               </a:rPr>
-              <a:t>  55  </a:t>
+              <a:t>  63  </a:t>
             </a:r>
             <a:r>
               <a:rPr sz="1400">
@@ -4918,7 +5018,7 @@
                 </a:solidFill>
                 <a:latin typeface="Consolas"/>
               </a:rPr>
-              <a:t>  56  </a:t>
+              <a:t>  64  </a:t>
             </a:r>
             <a:r>
               <a:rPr sz="1400">
@@ -5025,7 +5125,7 @@
                 </a:solidFill>
                 <a:latin typeface="Consolas"/>
               </a:rPr>
-              <a:t>  57  </a:t>
+              <a:t>  65  </a:t>
             </a:r>
             <a:r>
               <a:rPr sz="1400">
@@ -5050,7 +5150,7 @@
                 </a:solidFill>
                 <a:latin typeface="Consolas"/>
               </a:rPr>
-              <a:t>  58  </a:t>
+              <a:t>  66  </a:t>
             </a:r>
             <a:r>
               <a:rPr sz="1400">
@@ -5075,7 +5175,7 @@
                 </a:solidFill>
                 <a:latin typeface="Consolas"/>
               </a:rPr>
-              <a:t>  59  </a:t>
+              <a:t>  67  </a:t>
             </a:r>
             <a:r>
               <a:rPr sz="1400">
@@ -5100,7 +5200,7 @@
                 </a:solidFill>
                 <a:latin typeface="Consolas"/>
               </a:rPr>
-              <a:t>  60  </a:t>
+              <a:t>  68  </a:t>
             </a:r>
             <a:r>
               <a:rPr sz="1400">
@@ -5125,7 +5225,7 @@
                 </a:solidFill>
                 <a:latin typeface="Consolas"/>
               </a:rPr>
-              <a:t>  61  </a:t>
+              <a:t>  69  </a:t>
             </a:r>
             <a:r>
               <a:rPr sz="1400">
@@ -5150,7 +5250,7 @@
                 </a:solidFill>
                 <a:latin typeface="Consolas"/>
               </a:rPr>
-              <a:t>  62  </a:t>
+              <a:t>  70  </a:t>
             </a:r>
             <a:r>
               <a:rPr sz="1400">
@@ -5175,7 +5275,7 @@
                 </a:solidFill>
                 <a:latin typeface="Consolas"/>
               </a:rPr>
-              <a:t>  63  </a:t>
+              <a:t>  71  </a:t>
             </a:r>
             <a:r>
               <a:rPr sz="1400">
@@ -5200,7 +5300,7 @@
                 </a:solidFill>
                 <a:latin typeface="Consolas"/>
               </a:rPr>
-              <a:t>  64  </a:t>
+              <a:t>  72  </a:t>
             </a:r>
             <a:r>
               <a:rPr sz="1400">
@@ -5225,7 +5325,7 @@
                 </a:solidFill>
                 <a:latin typeface="Consolas"/>
               </a:rPr>
-              <a:t>  65  </a:t>
+              <a:t>  73  </a:t>
             </a:r>
             <a:r>
               <a:rPr sz="1400">
@@ -5250,7 +5350,7 @@
                 </a:solidFill>
                 <a:latin typeface="Consolas"/>
               </a:rPr>
-              <a:t>  66  </a:t>
+              <a:t>  74  </a:t>
             </a:r>
             <a:r>
               <a:rPr sz="1400">
@@ -5275,7 +5375,7 @@
                 </a:solidFill>
                 <a:latin typeface="Consolas"/>
               </a:rPr>
-              <a:t>  67  </a:t>
+              <a:t>  75  </a:t>
             </a:r>
             <a:r>
               <a:rPr sz="1400">
@@ -5300,7 +5400,7 @@
                 </a:solidFill>
                 <a:latin typeface="Consolas"/>
               </a:rPr>
-              <a:t>  68  </a:t>
+              <a:t>  76  </a:t>
             </a:r>
             <a:r>
               <a:rPr sz="1400">
@@ -5325,7 +5425,7 @@
                 </a:solidFill>
                 <a:latin typeface="Consolas"/>
               </a:rPr>
-              <a:t>  69  </a:t>
+              <a:t>  77  </a:t>
             </a:r>
             <a:r>
               <a:rPr sz="1400">
@@ -5432,16 +5532,41 @@
                 </a:solidFill>
                 <a:latin typeface="Consolas"/>
               </a:rPr>
-              <a:t>  24  </a:t>
+              <a:t>  29  </a:t>
             </a:r>
             <a:r>
               <a:rPr sz="1700">
                 <a:solidFill>
+                  <a:srgbClr val="DCECEF"/>
+                </a:solidFill>
+                <a:latin typeface="Consolas"/>
+              </a:rPr>
+              <a:t> </a:t>
+            </a:r>
+          </a:p>
+          <a:p>
+            <a:pPr>
+              <a:spcAft>
+                <a:spcPts val="0"/>
+              </a:spcAft>
+            </a:pPr>
+            <a:r>
+              <a:rPr sz="1700">
+                <a:solidFill>
+                  <a:srgbClr val="6D8C97"/>
+                </a:solidFill>
+                <a:latin typeface="Consolas"/>
+              </a:rPr>
+              <a:t>  30  </a:t>
+            </a:r>
+            <a:r>
+              <a:rPr sz="1700">
+                <a:solidFill>
                   <a:srgbClr val="7FE0A0"/>
                 </a:solidFill>
                 <a:latin typeface="Consolas"/>
               </a:rPr>
-              <a:t> </a:t>
+              <a:t>// Turn a status number into a sentence a person can act on.</a:t>
             </a:r>
           </a:p>
           <a:p>
@@ -5457,7 +5582,7 @@
                 </a:solidFill>
                 <a:latin typeface="Consolas"/>
               </a:rPr>
-              <a:t>  25  </a:t>
+              <a:t>  31  </a:t>
             </a:r>
             <a:r>
               <a:rPr sz="1700">
@@ -5466,7 +5591,7 @@
                 </a:solidFill>
                 <a:latin typeface="Consolas"/>
               </a:rPr>
-              <a:t>// Turn a status number into a sentence a person can act on.</a:t>
+              <a:t>function explain(status, problem) {</a:t>
             </a:r>
           </a:p>
           <a:p>
@@ -5482,7 +5607,7 @@
                 </a:solidFill>
                 <a:latin typeface="Consolas"/>
               </a:rPr>
-              <a:t>  26  </a:t>
+              <a:t>  32  </a:t>
             </a:r>
             <a:r>
               <a:rPr sz="1700">
@@ -5491,7 +5616,7 @@
                 </a:solidFill>
                 <a:latin typeface="Consolas"/>
               </a:rPr>
-              <a:t>function explain(status, problem) {</a:t>
+              <a:t>  // The server usually explains itself better than we can guess. Use its</a:t>
             </a:r>
           </a:p>
           <a:p>
@@ -5507,7 +5632,7 @@
                 </a:solidFill>
                 <a:latin typeface="Consolas"/>
               </a:rPr>
-              <a:t>  27  </a:t>
+              <a:t>  33  </a:t>
             </a:r>
             <a:r>
               <a:rPr sz="1700">
@@ -5516,6 +5641,81 @@
                 </a:solidFill>
                 <a:latin typeface="Consolas"/>
               </a:rPr>
+              <a:t>  // words when it gives us any, and fall back to our own when it does not.</a:t>
+            </a:r>
+          </a:p>
+          <a:p>
+            <a:pPr>
+              <a:spcAft>
+                <a:spcPts val="0"/>
+              </a:spcAft>
+            </a:pPr>
+            <a:r>
+              <a:rPr sz="1700">
+                <a:solidFill>
+                  <a:srgbClr val="6D8C97"/>
+                </a:solidFill>
+                <a:latin typeface="Consolas"/>
+              </a:rPr>
+              <a:t>  34  </a:t>
+            </a:r>
+            <a:r>
+              <a:rPr sz="1700">
+                <a:solidFill>
+                  <a:srgbClr val="7FE0A0"/>
+                </a:solidFill>
+                <a:latin typeface="Consolas"/>
+              </a:rPr>
+              <a:t>  const said = problem &amp;&amp; problem.error &amp;&amp; problem.error.message;</a:t>
+            </a:r>
+          </a:p>
+          <a:p>
+            <a:pPr>
+              <a:spcAft>
+                <a:spcPts val="0"/>
+              </a:spcAft>
+            </a:pPr>
+            <a:r>
+              <a:rPr sz="1700">
+                <a:solidFill>
+                  <a:srgbClr val="6D8C97"/>
+                </a:solidFill>
+                <a:latin typeface="Consolas"/>
+              </a:rPr>
+              <a:t>  35  </a:t>
+            </a:r>
+            <a:r>
+              <a:rPr sz="1700">
+                <a:solidFill>
+                  <a:srgbClr val="7FE0A0"/>
+                </a:solidFill>
+                <a:latin typeface="Consolas"/>
+              </a:rPr>
+              <a:t>  if (said) { return said; }</a:t>
+            </a:r>
+          </a:p>
+          <a:p>
+            <a:pPr>
+              <a:spcAft>
+                <a:spcPts val="0"/>
+              </a:spcAft>
+            </a:pPr>
+            <a:r>
+              <a:rPr sz="1700">
+                <a:solidFill>
+                  <a:srgbClr val="6D8C97"/>
+                </a:solidFill>
+                <a:latin typeface="Consolas"/>
+              </a:rPr>
+              <a:t>  36  </a:t>
+            </a:r>
+            <a:r>
+              <a:rPr sz="1700">
+                <a:solidFill>
+                  <a:srgbClr val="7FE0A0"/>
+                </a:solidFill>
+                <a:latin typeface="Consolas"/>
+              </a:rPr>
               <a:t>  if (status === 401) { return 'The server does not recognise your key. Check it for typos.'; }</a:t>
             </a:r>
           </a:p>
@@ -5532,7 +5732,7 @@
                 </a:solidFill>
                 <a:latin typeface="Consolas"/>
               </a:rPr>
-              <a:t>  28  </a:t>
+              <a:t>  37  </a:t>
             </a:r>
             <a:r>
               <a:rPr sz="1700">
@@ -5557,7 +5757,7 @@
                 </a:solidFill>
                 <a:latin typeface="Consolas"/>
               </a:rPr>
-              <a:t>  29  </a:t>
+              <a:t>  38  </a:t>
             </a:r>
             <a:r>
               <a:rPr sz="1700">
@@ -5566,7 +5766,7 @@
                 </a:solidFill>
                 <a:latin typeface="Consolas"/>
               </a:rPr>
-              <a:t>  if (status === 400) { return 'The server could not use that request: ' + problem.error.message; }</a:t>
+              <a:t>  return 'Something went wrong on the server (' + status + '). Try again in a moment.';</a:t>
             </a:r>
           </a:p>
           <a:p>
@@ -5582,37 +5782,12 @@
                 </a:solidFill>
                 <a:latin typeface="Consolas"/>
               </a:rPr>
-              <a:t>  30  </a:t>
+              <a:t>  39  </a:t>
             </a:r>
             <a:r>
               <a:rPr sz="1700">
                 <a:solidFill>
                   <a:srgbClr val="7FE0A0"/>
-                </a:solidFill>
-                <a:latin typeface="Consolas"/>
-              </a:rPr>
-              <a:t>  return 'Something went wrong on the server (' + status + '). Try again in a moment.';</a:t>
-            </a:r>
-          </a:p>
-          <a:p>
-            <a:pPr>
-              <a:spcAft>
-                <a:spcPts val="0"/>
-              </a:spcAft>
-            </a:pPr>
-            <a:r>
-              <a:rPr sz="1700">
-                <a:solidFill>
-                  <a:srgbClr val="6D8C97"/>
-                </a:solidFill>
-                <a:latin typeface="Consolas"/>
-              </a:rPr>
-              <a:t>  31  </a:t>
-            </a:r>
-            <a:r>
-              <a:rPr sz="1700">
-                <a:solidFill>
-                  <a:srgbClr val="DCECEF"/>
                 </a:solidFill>
                 <a:latin typeface="Consolas"/>
               </a:rPr>

--- a/ai101/slides/week-05.pptx
+++ b/ai101/slides/week-05.pptx
@@ -50,6 +50,7 @@
     <p:sldId id="298" r:id="rId49"/>
     <p:sldId id="299" r:id="rId50"/>
     <p:sldId id="300" r:id="rId51"/>
+    <p:sldId id="301" r:id="rId52"/>
   </p:sldIdLst>
   <p:sldSz cx="12191695" cy="6858000" type="screen4x3"/>
   <p:notesSz cx="6858000" cy="9144000"/>
@@ -16403,6 +16404,615 @@
     <p:bg>
       <p:bgPr>
         <a:solidFill>
+          <a:srgbClr val="F4F8FB"/>
+        </a:solidFill>
+        <a:effectLst/>
+      </p:bgPr>
+    </p:bg>
+    <p:spTree>
+      <p:nvGrpSpPr>
+        <p:cNvPr id="1" name=""/>
+        <p:cNvGrpSpPr/>
+        <p:nvPr/>
+      </p:nvGrpSpPr>
+      <p:grpSpPr/>
+      <p:sp>
+        <p:nvSpPr>
+          <p:cNvPr id="2" name="TextBox 1"/>
+          <p:cNvSpPr txBox="1"/>
+          <p:nvPr/>
+        </p:nvSpPr>
+        <p:spPr>
+          <a:xfrm>
+            <a:off x="822960" y="365760"/>
+            <a:ext cx="7315200" cy="365760"/>
+          </a:xfrm>
+          <a:prstGeom prst="rect">
+            <a:avLst/>
+          </a:prstGeom>
+          <a:noFill/>
+        </p:spPr>
+        <p:txBody>
+          <a:bodyPr wrap="none">
+            <a:spAutoFit/>
+          </a:bodyPr>
+          <a:lstStyle/>
+          <a:p>
+            <a:r>
+              <a:rPr sz="1400" b="1">
+                <a:solidFill>
+                  <a:srgbClr val="01AEFD"/>
+                </a:solidFill>
+              </a:rPr>
+              <a:t>ON THE PAGE</a:t>
+            </a:r>
+          </a:p>
+        </p:txBody>
+      </p:sp>
+      <p:sp>
+        <p:nvSpPr>
+          <p:cNvPr id="3" name="TextBox 2"/>
+          <p:cNvSpPr txBox="1"/>
+          <p:nvPr/>
+        </p:nvSpPr>
+        <p:spPr>
+          <a:xfrm>
+            <a:off x="822960" y="658368"/>
+            <a:ext cx="10515600" cy="731520"/>
+          </a:xfrm>
+          <a:prstGeom prst="rect">
+            <a:avLst/>
+          </a:prstGeom>
+          <a:noFill/>
+        </p:spPr>
+        <p:txBody>
+          <a:bodyPr wrap="none">
+            <a:spAutoFit/>
+          </a:bodyPr>
+          <a:lstStyle/>
+          <a:p>
+            <a:r>
+              <a:rPr sz="3200" b="1">
+                <a:solidFill>
+                  <a:srgbClr val="1F2A37"/>
+                </a:solidFill>
+              </a:rPr>
+              <a:t>line-height</a:t>
+            </a:r>
+          </a:p>
+        </p:txBody>
+      </p:sp>
+      <p:sp>
+        <p:nvSpPr>
+          <p:cNvPr id="4" name="Rounded Rectangle 3"/>
+          <p:cNvSpPr/>
+          <p:nvPr/>
+        </p:nvSpPr>
+        <p:spPr>
+          <a:xfrm>
+            <a:off x="3454237" y="1641896"/>
+            <a:ext cx="5249387" cy="3918021"/>
+          </a:xfrm>
+          <a:prstGeom prst="roundRect">
+            <a:avLst/>
+          </a:prstGeom>
+          <a:solidFill>
+            <a:srgbClr val="0F1F27"/>
+          </a:solidFill>
+          <a:ln>
+            <a:noFill/>
+          </a:ln>
+          <a:effectLst/>
+        </p:spPr>
+        <p:style>
+          <a:lnRef idx="1">
+            <a:schemeClr val="accent1"/>
+          </a:lnRef>
+          <a:fillRef idx="3">
+            <a:schemeClr val="accent1"/>
+          </a:fillRef>
+          <a:effectRef idx="2">
+            <a:schemeClr val="accent1"/>
+          </a:effectRef>
+          <a:fontRef idx="minor">
+            <a:schemeClr val="lt1"/>
+          </a:fontRef>
+        </p:style>
+        <p:txBody>
+          <a:bodyPr rtlCol="0" anchor="ctr"/>
+          <a:lstStyle/>
+          <a:p>
+            <a:pPr algn="ctr"/>
+          </a:p>
+        </p:txBody>
+      </p:sp>
+      <p:sp>
+        <p:nvSpPr>
+          <p:cNvPr id="5" name="Rounded Rectangle 4"/>
+          <p:cNvSpPr/>
+          <p:nvPr/>
+        </p:nvSpPr>
+        <p:spPr>
+          <a:xfrm>
+            <a:off x="3606393" y="2022287"/>
+            <a:ext cx="4945075" cy="437448"/>
+          </a:xfrm>
+          <a:prstGeom prst="roundRect">
+            <a:avLst/>
+          </a:prstGeom>
+          <a:solidFill>
+            <a:srgbClr val="16303A"/>
+          </a:solidFill>
+          <a:ln>
+            <a:noFill/>
+          </a:ln>
+          <a:effectLst/>
+        </p:spPr>
+        <p:style>
+          <a:lnRef idx="1">
+            <a:schemeClr val="accent1"/>
+          </a:lnRef>
+          <a:fillRef idx="3">
+            <a:schemeClr val="accent1"/>
+          </a:fillRef>
+          <a:effectRef idx="2">
+            <a:schemeClr val="accent1"/>
+          </a:effectRef>
+          <a:fontRef idx="minor">
+            <a:schemeClr val="lt1"/>
+          </a:fontRef>
+        </p:style>
+        <p:txBody>
+          <a:bodyPr rtlCol="0" anchor="ctr"/>
+          <a:lstStyle/>
+          <a:p>
+            <a:pPr algn="ctr"/>
+          </a:p>
+        </p:txBody>
+      </p:sp>
+      <p:sp>
+        <p:nvSpPr>
+          <p:cNvPr id="6" name="Rounded Rectangle 5"/>
+          <p:cNvSpPr/>
+          <p:nvPr/>
+        </p:nvSpPr>
+        <p:spPr>
+          <a:xfrm>
+            <a:off x="3720510" y="2155423"/>
+            <a:ext cx="1426463" cy="190195"/>
+          </a:xfrm>
+          <a:prstGeom prst="roundRect">
+            <a:avLst/>
+          </a:prstGeom>
+          <a:solidFill>
+            <a:srgbClr val="4A6B78"/>
+          </a:solidFill>
+          <a:ln>
+            <a:noFill/>
+          </a:ln>
+          <a:effectLst/>
+        </p:spPr>
+        <p:style>
+          <a:lnRef idx="1">
+            <a:schemeClr val="accent1"/>
+          </a:lnRef>
+          <a:fillRef idx="3">
+            <a:schemeClr val="accent1"/>
+          </a:fillRef>
+          <a:effectRef idx="2">
+            <a:schemeClr val="accent1"/>
+          </a:effectRef>
+          <a:fontRef idx="minor">
+            <a:schemeClr val="lt1"/>
+          </a:fontRef>
+        </p:style>
+        <p:txBody>
+          <a:bodyPr rtlCol="0" anchor="ctr"/>
+          <a:lstStyle/>
+          <a:p>
+            <a:pPr algn="ctr"/>
+          </a:p>
+        </p:txBody>
+      </p:sp>
+      <p:sp>
+        <p:nvSpPr>
+          <p:cNvPr id="7" name="Rounded Rectangle 6"/>
+          <p:cNvSpPr/>
+          <p:nvPr/>
+        </p:nvSpPr>
+        <p:spPr>
+          <a:xfrm>
+            <a:off x="3606393" y="2554833"/>
+            <a:ext cx="4945075" cy="1806854"/>
+          </a:xfrm>
+          <a:prstGeom prst="roundRect">
+            <a:avLst/>
+          </a:prstGeom>
+          <a:solidFill>
+            <a:srgbClr val="0B171D"/>
+          </a:solidFill>
+          <a:ln>
+            <a:noFill/>
+          </a:ln>
+          <a:effectLst/>
+        </p:spPr>
+        <p:style>
+          <a:lnRef idx="1">
+            <a:schemeClr val="accent1"/>
+          </a:lnRef>
+          <a:fillRef idx="3">
+            <a:schemeClr val="accent1"/>
+          </a:fillRef>
+          <a:effectRef idx="2">
+            <a:schemeClr val="accent1"/>
+          </a:effectRef>
+          <a:fontRef idx="minor">
+            <a:schemeClr val="lt1"/>
+          </a:fontRef>
+        </p:style>
+        <p:txBody>
+          <a:bodyPr rtlCol="0" anchor="ctr"/>
+          <a:lstStyle/>
+          <a:p>
+            <a:pPr algn="ctr"/>
+          </a:p>
+        </p:txBody>
+      </p:sp>
+      <p:sp>
+        <p:nvSpPr>
+          <p:cNvPr id="8" name="Rounded Rectangle 7"/>
+          <p:cNvSpPr/>
+          <p:nvPr/>
+        </p:nvSpPr>
+        <p:spPr>
+          <a:xfrm>
+            <a:off x="3720510" y="2668950"/>
+            <a:ext cx="2852927" cy="399409"/>
+          </a:xfrm>
+          <a:prstGeom prst="roundRect">
+            <a:avLst/>
+          </a:prstGeom>
+          <a:solidFill>
+            <a:srgbClr val="1B3540"/>
+          </a:solidFill>
+          <a:ln>
+            <a:noFill/>
+          </a:ln>
+          <a:effectLst/>
+        </p:spPr>
+        <p:style>
+          <a:lnRef idx="1">
+            <a:schemeClr val="accent1"/>
+          </a:lnRef>
+          <a:fillRef idx="3">
+            <a:schemeClr val="accent1"/>
+          </a:fillRef>
+          <a:effectRef idx="2">
+            <a:schemeClr val="accent1"/>
+          </a:effectRef>
+          <a:fontRef idx="minor">
+            <a:schemeClr val="lt1"/>
+          </a:fontRef>
+        </p:style>
+        <p:txBody>
+          <a:bodyPr rtlCol="0" anchor="ctr"/>
+          <a:lstStyle/>
+          <a:p>
+            <a:pPr algn="ctr"/>
+          </a:p>
+        </p:txBody>
+      </p:sp>
+      <p:sp>
+        <p:nvSpPr>
+          <p:cNvPr id="9" name="Rounded Rectangle 8"/>
+          <p:cNvSpPr/>
+          <p:nvPr/>
+        </p:nvSpPr>
+        <p:spPr>
+          <a:xfrm>
+            <a:off x="5584423" y="3182477"/>
+            <a:ext cx="2852927" cy="399409"/>
+          </a:xfrm>
+          <a:prstGeom prst="roundRect">
+            <a:avLst/>
+          </a:prstGeom>
+          <a:solidFill>
+            <a:srgbClr val="123A32"/>
+          </a:solidFill>
+          <a:ln>
+            <a:noFill/>
+          </a:ln>
+          <a:effectLst/>
+        </p:spPr>
+        <p:style>
+          <a:lnRef idx="1">
+            <a:schemeClr val="accent1"/>
+          </a:lnRef>
+          <a:fillRef idx="3">
+            <a:schemeClr val="accent1"/>
+          </a:fillRef>
+          <a:effectRef idx="2">
+            <a:schemeClr val="accent1"/>
+          </a:effectRef>
+          <a:fontRef idx="minor">
+            <a:schemeClr val="lt1"/>
+          </a:fontRef>
+        </p:style>
+        <p:txBody>
+          <a:bodyPr rtlCol="0" anchor="ctr"/>
+          <a:lstStyle/>
+          <a:p>
+            <a:pPr algn="ctr"/>
+          </a:p>
+        </p:txBody>
+      </p:sp>
+      <p:sp>
+        <p:nvSpPr>
+          <p:cNvPr id="10" name="Rounded Rectangle 9"/>
+          <p:cNvSpPr/>
+          <p:nvPr/>
+        </p:nvSpPr>
+        <p:spPr>
+          <a:xfrm>
+            <a:off x="3720510" y="3696004"/>
+            <a:ext cx="3138220" cy="399409"/>
+          </a:xfrm>
+          <a:prstGeom prst="roundRect">
+            <a:avLst/>
+          </a:prstGeom>
+          <a:solidFill>
+            <a:srgbClr val="1B3540"/>
+          </a:solidFill>
+          <a:ln>
+            <a:noFill/>
+          </a:ln>
+          <a:effectLst/>
+        </p:spPr>
+        <p:style>
+          <a:lnRef idx="1">
+            <a:schemeClr val="accent1"/>
+          </a:lnRef>
+          <a:fillRef idx="3">
+            <a:schemeClr val="accent1"/>
+          </a:fillRef>
+          <a:effectRef idx="2">
+            <a:schemeClr val="accent1"/>
+          </a:effectRef>
+          <a:fontRef idx="minor">
+            <a:schemeClr val="lt1"/>
+          </a:fontRef>
+        </p:style>
+        <p:txBody>
+          <a:bodyPr rtlCol="0" anchor="ctr"/>
+          <a:lstStyle/>
+          <a:p>
+            <a:pPr algn="ctr"/>
+          </a:p>
+        </p:txBody>
+      </p:sp>
+      <p:sp>
+        <p:nvSpPr>
+          <p:cNvPr id="11" name="Rounded Rectangle 10"/>
+          <p:cNvSpPr/>
+          <p:nvPr/>
+        </p:nvSpPr>
+        <p:spPr>
+          <a:xfrm>
+            <a:off x="3701491" y="4856195"/>
+            <a:ext cx="3899001" cy="323331"/>
+          </a:xfrm>
+          <a:prstGeom prst="roundRect">
+            <a:avLst/>
+          </a:prstGeom>
+          <a:solidFill>
+            <a:srgbClr val="16303A"/>
+          </a:solidFill>
+          <a:ln>
+            <a:noFill/>
+          </a:ln>
+          <a:effectLst/>
+        </p:spPr>
+        <p:style>
+          <a:lnRef idx="1">
+            <a:schemeClr val="accent1"/>
+          </a:lnRef>
+          <a:fillRef idx="3">
+            <a:schemeClr val="accent1"/>
+          </a:fillRef>
+          <a:effectRef idx="2">
+            <a:schemeClr val="accent1"/>
+          </a:effectRef>
+          <a:fontRef idx="minor">
+            <a:schemeClr val="lt1"/>
+          </a:fontRef>
+        </p:style>
+        <p:txBody>
+          <a:bodyPr rtlCol="0" anchor="ctr"/>
+          <a:lstStyle/>
+          <a:p>
+            <a:pPr algn="ctr"/>
+          </a:p>
+        </p:txBody>
+      </p:sp>
+      <p:sp>
+        <p:nvSpPr>
+          <p:cNvPr id="12" name="Rounded Rectangle 11"/>
+          <p:cNvSpPr/>
+          <p:nvPr/>
+        </p:nvSpPr>
+        <p:spPr>
+          <a:xfrm>
+            <a:off x="7695590" y="4856195"/>
+            <a:ext cx="779800" cy="323331"/>
+          </a:xfrm>
+          <a:prstGeom prst="roundRect">
+            <a:avLst/>
+          </a:prstGeom>
+          <a:solidFill>
+            <a:srgbClr val="01AEFD"/>
+          </a:solidFill>
+          <a:ln>
+            <a:noFill/>
+          </a:ln>
+          <a:effectLst/>
+        </p:spPr>
+        <p:style>
+          <a:lnRef idx="1">
+            <a:schemeClr val="accent1"/>
+          </a:lnRef>
+          <a:fillRef idx="3">
+            <a:schemeClr val="accent1"/>
+          </a:fillRef>
+          <a:effectRef idx="2">
+            <a:schemeClr val="accent1"/>
+          </a:effectRef>
+          <a:fontRef idx="minor">
+            <a:schemeClr val="lt1"/>
+          </a:fontRef>
+        </p:style>
+        <p:txBody>
+          <a:bodyPr rtlCol="0" anchor="ctr"/>
+          <a:lstStyle/>
+          <a:p>
+            <a:pPr algn="ctr"/>
+          </a:p>
+        </p:txBody>
+      </p:sp>
+      <p:sp>
+        <p:nvSpPr>
+          <p:cNvPr id="13" name="Rounded Rectangle 12"/>
+          <p:cNvSpPr/>
+          <p:nvPr/>
+        </p:nvSpPr>
+        <p:spPr>
+          <a:xfrm>
+            <a:off x="3720510" y="5407761"/>
+            <a:ext cx="1616659" cy="95097"/>
+          </a:xfrm>
+          <a:prstGeom prst="roundRect">
+            <a:avLst/>
+          </a:prstGeom>
+          <a:solidFill>
+            <a:srgbClr val="2A4550"/>
+          </a:solidFill>
+          <a:ln>
+            <a:noFill/>
+          </a:ln>
+          <a:effectLst/>
+        </p:spPr>
+        <p:style>
+          <a:lnRef idx="1">
+            <a:schemeClr val="accent1"/>
+          </a:lnRef>
+          <a:fillRef idx="3">
+            <a:schemeClr val="accent1"/>
+          </a:fillRef>
+          <a:effectRef idx="2">
+            <a:schemeClr val="accent1"/>
+          </a:effectRef>
+          <a:fontRef idx="minor">
+            <a:schemeClr val="lt1"/>
+          </a:fontRef>
+        </p:style>
+        <p:txBody>
+          <a:bodyPr rtlCol="0" anchor="ctr"/>
+          <a:lstStyle/>
+          <a:p>
+            <a:pPr algn="ctr"/>
+          </a:p>
+        </p:txBody>
+      </p:sp>
+      <p:sp>
+        <p:nvSpPr>
+          <p:cNvPr id="14" name="Rounded Rectangle 13"/>
+          <p:cNvSpPr/>
+          <p:nvPr/>
+        </p:nvSpPr>
+        <p:spPr>
+          <a:xfrm>
+            <a:off x="3682471" y="2630911"/>
+            <a:ext cx="2929006" cy="475488"/>
+          </a:xfrm>
+          <a:prstGeom prst="roundRect">
+            <a:avLst/>
+          </a:prstGeom>
+          <a:noFill/>
+          <a:ln w="44450">
+            <a:solidFill>
+              <a:srgbClr val="FFD633"/>
+            </a:solidFill>
+          </a:ln>
+          <a:effectLst/>
+        </p:spPr>
+        <p:style>
+          <a:lnRef idx="1">
+            <a:schemeClr val="accent1"/>
+          </a:lnRef>
+          <a:fillRef idx="3">
+            <a:schemeClr val="accent1"/>
+          </a:fillRef>
+          <a:effectRef idx="2">
+            <a:schemeClr val="accent1"/>
+          </a:effectRef>
+          <a:fontRef idx="minor">
+            <a:schemeClr val="lt1"/>
+          </a:fontRef>
+        </p:style>
+        <p:txBody>
+          <a:bodyPr rtlCol="0" anchor="ctr"/>
+          <a:lstStyle/>
+          <a:p>
+            <a:pPr algn="ctr"/>
+          </a:p>
+        </p:txBody>
+      </p:sp>
+      <p:sp>
+        <p:nvSpPr>
+          <p:cNvPr id="15" name="TextBox 14"/>
+          <p:cNvSpPr txBox="1"/>
+          <p:nvPr/>
+        </p:nvSpPr>
+        <p:spPr>
+          <a:xfrm>
+            <a:off x="822960" y="6172200"/>
+            <a:ext cx="10515600" cy="548640"/>
+          </a:xfrm>
+          <a:prstGeom prst="rect">
+            <a:avLst/>
+          </a:prstGeom>
+          <a:noFill/>
+        </p:spPr>
+        <p:txBody>
+          <a:bodyPr wrap="square">
+            <a:spAutoFit/>
+          </a:bodyPr>
+          <a:lstStyle/>
+          <a:p>
+            <a:r>
+              <a:rPr sz="2000">
+                <a:solidFill>
+                  <a:srgbClr val="0A6299"/>
+                </a:solidFill>
+              </a:rPr>
+              <a:t>line-height spaces the lines inside a message.</a:t>
+            </a:r>
+          </a:p>
+        </p:txBody>
+      </p:sp>
+    </p:spTree>
+  </p:cSld>
+  <p:clrMapOvr>
+    <a:masterClrMapping/>
+  </p:clrMapOvr>
+</p:sld>
+</file>
+
+<file path=ppt/slides/slide44.xml><?xml version="1.0" encoding="utf-8"?>
+<p:sld xmlns:a="http://schemas.openxmlformats.org/drawingml/2006/main" xmlns:p="http://schemas.openxmlformats.org/presentationml/2006/main" xmlns:r="http://schemas.openxmlformats.org/officeDocument/2006/relationships">
+  <p:cSld>
+    <p:bg>
+      <p:bgPr>
+        <a:solidFill>
           <a:srgbClr val="102127"/>
         </a:solidFill>
         <a:effectLst/>
@@ -16537,7 +17147,7 @@
 </p:sld>
 </file>
 
-<file path=ppt/slides/slide44.xml><?xml version="1.0" encoding="utf-8"?>
+<file path=ppt/slides/slide45.xml><?xml version="1.0" encoding="utf-8"?>
 <p:sld xmlns:a="http://schemas.openxmlformats.org/drawingml/2006/main" xmlns:p="http://schemas.openxmlformats.org/presentationml/2006/main" xmlns:r="http://schemas.openxmlformats.org/officeDocument/2006/relationships">
   <p:cSld>
     <p:spTree>
@@ -16682,7 +17292,7 @@
 </p:sld>
 </file>
 
-<file path=ppt/slides/slide45.xml><?xml version="1.0" encoding="utf-8"?>
+<file path=ppt/slides/slide46.xml><?xml version="1.0" encoding="utf-8"?>
 <p:sld xmlns:a="http://schemas.openxmlformats.org/drawingml/2006/main" xmlns:p="http://schemas.openxmlformats.org/presentationml/2006/main" xmlns:r="http://schemas.openxmlformats.org/officeDocument/2006/relationships">
   <p:cSld>
     <p:spTree>

--- a/ai101/slides/week-05.pptx
+++ b/ai101/slides/week-05.pptx
@@ -18158,7 +18158,7 @@
         <p:spPr>
           <a:xfrm>
             <a:off x="3606393" y="2554833"/>
-            <a:ext cx="4945075" cy="1806854"/>
+            <a:ext cx="4945075" cy="1730776"/>
           </a:xfrm>
           <a:prstGeom prst="roundRect">
             <a:avLst/>
@@ -18333,6 +18333,94 @@
         </p:nvSpPr>
         <p:spPr>
           <a:xfrm>
+            <a:off x="3701491" y="4409236"/>
+            <a:ext cx="1426463" cy="228234"/>
+          </a:xfrm>
+          <a:prstGeom prst="roundRect">
+            <a:avLst/>
+          </a:prstGeom>
+          <a:solidFill>
+            <a:srgbClr val="16303A"/>
+          </a:solidFill>
+          <a:ln>
+            <a:noFill/>
+          </a:ln>
+          <a:effectLst/>
+        </p:spPr>
+        <p:style>
+          <a:lnRef idx="1">
+            <a:schemeClr val="accent1"/>
+          </a:lnRef>
+          <a:fillRef idx="3">
+            <a:schemeClr val="accent1"/>
+          </a:fillRef>
+          <a:effectRef idx="2">
+            <a:schemeClr val="accent1"/>
+          </a:effectRef>
+          <a:fontRef idx="minor">
+            <a:schemeClr val="lt1"/>
+          </a:fontRef>
+        </p:style>
+        <p:txBody>
+          <a:bodyPr rtlCol="0" anchor="ctr"/>
+          <a:lstStyle/>
+          <a:p>
+            <a:pPr algn="ctr"/>
+          </a:p>
+        </p:txBody>
+      </p:sp>
+      <p:sp>
+        <p:nvSpPr>
+          <p:cNvPr id="12" name="Rounded Rectangle 11"/>
+          <p:cNvSpPr/>
+          <p:nvPr/>
+        </p:nvSpPr>
+        <p:spPr>
+          <a:xfrm>
+            <a:off x="5223052" y="4409236"/>
+            <a:ext cx="1426463" cy="228234"/>
+          </a:xfrm>
+          <a:prstGeom prst="roundRect">
+            <a:avLst/>
+          </a:prstGeom>
+          <a:solidFill>
+            <a:srgbClr val="16303A"/>
+          </a:solidFill>
+          <a:ln>
+            <a:noFill/>
+          </a:ln>
+          <a:effectLst/>
+        </p:spPr>
+        <p:style>
+          <a:lnRef idx="1">
+            <a:schemeClr val="accent1"/>
+          </a:lnRef>
+          <a:fillRef idx="3">
+            <a:schemeClr val="accent1"/>
+          </a:fillRef>
+          <a:effectRef idx="2">
+            <a:schemeClr val="accent1"/>
+          </a:effectRef>
+          <a:fontRef idx="minor">
+            <a:schemeClr val="lt1"/>
+          </a:fontRef>
+        </p:style>
+        <p:txBody>
+          <a:bodyPr rtlCol="0" anchor="ctr"/>
+          <a:lstStyle/>
+          <a:p>
+            <a:pPr algn="ctr"/>
+          </a:p>
+        </p:txBody>
+      </p:sp>
+      <p:sp>
+        <p:nvSpPr>
+          <p:cNvPr id="13" name="Rounded Rectangle 12"/>
+          <p:cNvSpPr/>
+          <p:nvPr/>
+        </p:nvSpPr>
+        <p:spPr>
+          <a:xfrm>
             <a:off x="3701491" y="4856195"/>
             <a:ext cx="3899001" cy="323331"/>
           </a:xfrm>
@@ -18371,7 +18459,7 @@
       </p:sp>
       <p:sp>
         <p:nvSpPr>
-          <p:cNvPr id="12" name="Rounded Rectangle 11"/>
+          <p:cNvPr id="14" name="Rounded Rectangle 13"/>
           <p:cNvSpPr/>
           <p:nvPr/>
         </p:nvSpPr>
@@ -18415,7 +18503,7 @@
       </p:sp>
       <p:sp>
         <p:nvSpPr>
-          <p:cNvPr id="13" name="Rounded Rectangle 12"/>
+          <p:cNvPr id="15" name="Rounded Rectangle 14"/>
           <p:cNvSpPr/>
           <p:nvPr/>
         </p:nvSpPr>
@@ -18459,7 +18547,7 @@
       </p:sp>
       <p:sp>
         <p:nvSpPr>
-          <p:cNvPr id="14" name="Rounded Rectangle 13"/>
+          <p:cNvPr id="16" name="Rounded Rectangle 15"/>
           <p:cNvSpPr/>
           <p:nvPr/>
         </p:nvSpPr>
@@ -18503,7 +18591,7 @@
       </p:sp>
       <p:sp>
         <p:nvSpPr>
-          <p:cNvPr id="15" name="TextBox 14"/>
+          <p:cNvPr id="17" name="TextBox 16"/>
           <p:cNvSpPr txBox="1"/>
           <p:nvPr/>
         </p:nvSpPr>

--- a/ai101/slides/week-05.pptx
+++ b/ai101/slides/week-05.pptx
@@ -11008,7 +11008,7 @@
                 </a:solidFill>
                 <a:latin typeface="Consolas"/>
               </a:rPr>
-              <a:t>  addLine('You', text);</a:t>
+              <a:t>  addLine('you', text);</a:t>
             </a:r>
           </a:p>
           <a:p>
@@ -11033,7 +11033,7 @@
                 </a:solidFill>
                 <a:latin typeface="Consolas"/>
               </a:rPr>
-              <a:t>  addLine('Companion', 'thinking...');</a:t>
+              <a:t>  addLine('bot', 'thinking...');</a:t>
             </a:r>
           </a:p>
           <a:p>
@@ -11373,7 +11373,7 @@
                 </a:solidFill>
                 <a:latin typeface="Consolas"/>
               </a:rPr>
-              <a:t>  addLine('You', text);</a:t>
+              <a:t>  addLine('you', text);</a:t>
             </a:r>
           </a:p>
           <a:p>
@@ -11398,7 +11398,7 @@
                 </a:solidFill>
                 <a:latin typeface="Consolas"/>
               </a:rPr>
-              <a:t>  addLine('Companion', 'thinking...');</a:t>
+              <a:t>  addLine('bot', 'thinking...');</a:t>
             </a:r>
           </a:p>
           <a:p>
@@ -11763,7 +11763,7 @@
                 </a:solidFill>
                 <a:latin typeface="Consolas"/>
               </a:rPr>
-              <a:t>  addLine('You', text);</a:t>
+              <a:t>  addLine('you', text);</a:t>
             </a:r>
           </a:p>
           <a:p>
@@ -11788,7 +11788,7 @@
                 </a:solidFill>
                 <a:latin typeface="Consolas"/>
               </a:rPr>
-              <a:t>  addLine('Companion', 'thinking...');</a:t>
+              <a:t>  addLine('bot', 'thinking...');</a:t>
             </a:r>
           </a:p>
           <a:p>
@@ -12178,7 +12178,7 @@
                 </a:solidFill>
                 <a:latin typeface="Consolas"/>
               </a:rPr>
-              <a:t>  addLine('You', text);</a:t>
+              <a:t>  addLine('you', text);</a:t>
             </a:r>
           </a:p>
           <a:p>
@@ -12203,7 +12203,7 @@
                 </a:solidFill>
                 <a:latin typeface="Consolas"/>
               </a:rPr>
-              <a:t>  addLine('Companion', 'thinking...');</a:t>
+              <a:t>  addLine('bot', 'thinking...');</a:t>
             </a:r>
           </a:p>
           <a:p>
@@ -12303,7 +12303,7 @@
                 </a:solidFill>
                 <a:latin typeface="Consolas"/>
               </a:rPr>
-              <a:t>    addLine('Companion', reply);</a:t>
+              <a:t>    addLine('bot', reply);</a:t>
             </a:r>
           </a:p>
         </p:txBody>
@@ -12730,7 +12730,7 @@
                 </a:solidFill>
                 <a:latin typeface="Consolas"/>
               </a:rPr>
-              <a:t>  addLine('You', text);</a:t>
+              <a:t>  addLine('you', text);</a:t>
             </a:r>
           </a:p>
           <a:p>
@@ -12755,7 +12755,7 @@
                 </a:solidFill>
                 <a:latin typeface="Consolas"/>
               </a:rPr>
-              <a:t>  addLine('Companion', 'thinking...');</a:t>
+              <a:t>  addLine('bot', 'thinking...');</a:t>
             </a:r>
           </a:p>
           <a:p>
@@ -12855,7 +12855,7 @@
                 </a:solidFill>
                 <a:latin typeface="Consolas"/>
               </a:rPr>
-              <a:t>    addLine('Companion', reply);</a:t>
+              <a:t>    addLine('bot', reply);</a:t>
             </a:r>
           </a:p>
           <a:p>
@@ -13195,7 +13195,7 @@
                 </a:solidFill>
                 <a:latin typeface="Consolas"/>
               </a:rPr>
-              <a:t>  addLine('You', text);</a:t>
+              <a:t>  addLine('you', text);</a:t>
             </a:r>
           </a:p>
           <a:p>
@@ -13220,7 +13220,7 @@
                 </a:solidFill>
                 <a:latin typeface="Consolas"/>
               </a:rPr>
-              <a:t>  addLine('Companion', 'thinking...');</a:t>
+              <a:t>  addLine('bot', 'thinking...');</a:t>
             </a:r>
           </a:p>
           <a:p>
@@ -13320,7 +13320,7 @@
                 </a:solidFill>
                 <a:latin typeface="Consolas"/>
               </a:rPr>
-              <a:t>    addLine('Companion', reply);</a:t>
+              <a:t>    addLine('bot', reply);</a:t>
             </a:r>
           </a:p>
           <a:p>
@@ -13685,7 +13685,7 @@
                 </a:solidFill>
                 <a:latin typeface="Consolas"/>
               </a:rPr>
-              <a:t>  addLine('You', text);</a:t>
+              <a:t>  addLine('you', text);</a:t>
             </a:r>
           </a:p>
           <a:p>
@@ -13710,7 +13710,7 @@
                 </a:solidFill>
                 <a:latin typeface="Consolas"/>
               </a:rPr>
-              <a:t>  addLine('Companion', 'thinking...');</a:t>
+              <a:t>  addLine('bot', 'thinking...');</a:t>
             </a:r>
           </a:p>
           <a:p>
@@ -13810,7 +13810,7 @@
                 </a:solidFill>
                 <a:latin typeface="Consolas"/>
               </a:rPr>
-              <a:t>    addLine('Companion', reply);</a:t>
+              <a:t>    addLine('bot', reply);</a:t>
             </a:r>
           </a:p>
           <a:p>
@@ -14200,7 +14200,7 @@
                 </a:solidFill>
                 <a:latin typeface="Consolas"/>
               </a:rPr>
-              <a:t>  addLine('You', text);</a:t>
+              <a:t>  addLine('you', text);</a:t>
             </a:r>
           </a:p>
           <a:p>
@@ -14225,7 +14225,7 @@
                 </a:solidFill>
                 <a:latin typeface="Consolas"/>
               </a:rPr>
-              <a:t>  addLine('Companion', 'thinking...');</a:t>
+              <a:t>  addLine('bot', 'thinking...');</a:t>
             </a:r>
           </a:p>
           <a:p>
@@ -14325,7 +14325,7 @@
                 </a:solidFill>
                 <a:latin typeface="Consolas"/>
               </a:rPr>
-              <a:t>    addLine('Companion', reply);</a:t>
+              <a:t>    addLine('bot', reply);</a:t>
             </a:r>
           </a:p>
           <a:p>
@@ -14740,7 +14740,7 @@
                 </a:solidFill>
                 <a:latin typeface="Consolas"/>
               </a:rPr>
-              <a:t>  addLine('You', text);</a:t>
+              <a:t>  addLine('you', text);</a:t>
             </a:r>
           </a:p>
           <a:p>
@@ -14765,7 +14765,7 @@
                 </a:solidFill>
                 <a:latin typeface="Consolas"/>
               </a:rPr>
-              <a:t>  addLine('Companion', 'thinking...');</a:t>
+              <a:t>  addLine('bot', 'thinking...');</a:t>
             </a:r>
           </a:p>
           <a:p>
@@ -14865,7 +14865,7 @@
                 </a:solidFill>
                 <a:latin typeface="Consolas"/>
               </a:rPr>
-              <a:t>    addLine('Companion', reply);</a:t>
+              <a:t>    addLine('bot', reply);</a:t>
             </a:r>
           </a:p>
           <a:p>
@@ -14990,7 +14990,7 @@
                 </a:solidFill>
                 <a:latin typeface="Consolas"/>
               </a:rPr>
-              <a:t>    addLine('Problem', problem.message === 'Failed to fetch'</a:t>
+              <a:t>    addLine('problem', problem.message === 'Failed to fetch'</a:t>
             </a:r>
           </a:p>
         </p:txBody>
@@ -15435,7 +15435,7 @@
                 </a:solidFill>
                 <a:latin typeface="Consolas"/>
               </a:rPr>
-              <a:t>  addLine('You', text);</a:t>
+              <a:t>  addLine('you', text);</a:t>
             </a:r>
           </a:p>
           <a:p>
@@ -15460,7 +15460,7 @@
                 </a:solidFill>
                 <a:latin typeface="Consolas"/>
               </a:rPr>
-              <a:t>  addLine('Companion', 'thinking...');</a:t>
+              <a:t>  addLine('bot', 'thinking...');</a:t>
             </a:r>
           </a:p>
           <a:p>
@@ -15560,7 +15560,7 @@
                 </a:solidFill>
                 <a:latin typeface="Consolas"/>
               </a:rPr>
-              <a:t>    addLine('Companion', reply);</a:t>
+              <a:t>    addLine('bot', reply);</a:t>
             </a:r>
           </a:p>
           <a:p>
@@ -15685,7 +15685,7 @@
                 </a:solidFill>
                 <a:latin typeface="Consolas"/>
               </a:rPr>
-              <a:t>    addLine('Problem', problem.message === 'Failed to fetch'</a:t>
+              <a:t>    addLine('problem', problem.message === 'Failed to fetch'</a:t>
             </a:r>
           </a:p>
           <a:p>
@@ -16025,7 +16025,7 @@
                 </a:solidFill>
                 <a:latin typeface="Consolas"/>
               </a:rPr>
-              <a:t>  addLine('You', text);</a:t>
+              <a:t>  addLine('you', text);</a:t>
             </a:r>
           </a:p>
           <a:p>
@@ -16050,7 +16050,7 @@
                 </a:solidFill>
                 <a:latin typeface="Consolas"/>
               </a:rPr>
-              <a:t>  addLine('Companion', 'thinking...');</a:t>
+              <a:t>  addLine('bot', 'thinking...');</a:t>
             </a:r>
           </a:p>
           <a:p>
@@ -16150,7 +16150,7 @@
                 </a:solidFill>
                 <a:latin typeface="Consolas"/>
               </a:rPr>
-              <a:t>    addLine('Companion', reply);</a:t>
+              <a:t>    addLine('bot', reply);</a:t>
             </a:r>
           </a:p>
           <a:p>
@@ -16275,7 +16275,7 @@
                 </a:solidFill>
                 <a:latin typeface="Consolas"/>
               </a:rPr>
-              <a:t>    addLine('Problem', problem.message === 'Failed to fetch'</a:t>
+              <a:t>    addLine('problem', problem.message === 'Failed to fetch'</a:t>
             </a:r>
           </a:p>
           <a:p>
@@ -16640,7 +16640,7 @@
                 </a:solidFill>
                 <a:latin typeface="Consolas"/>
               </a:rPr>
-              <a:t>  addLine('You', text);</a:t>
+              <a:t>  addLine('you', text);</a:t>
             </a:r>
           </a:p>
           <a:p>
@@ -16665,7 +16665,7 @@
                 </a:solidFill>
                 <a:latin typeface="Consolas"/>
               </a:rPr>
-              <a:t>  addLine('Companion', 'thinking...');</a:t>
+              <a:t>  addLine('bot', 'thinking...');</a:t>
             </a:r>
           </a:p>
           <a:p>
@@ -16765,7 +16765,7 @@
                 </a:solidFill>
                 <a:latin typeface="Consolas"/>
               </a:rPr>
-              <a:t>    addLine('Companion', reply);</a:t>
+              <a:t>    addLine('bot', reply);</a:t>
             </a:r>
           </a:p>
           <a:p>
@@ -16890,7 +16890,7 @@
                 </a:solidFill>
                 <a:latin typeface="Consolas"/>
               </a:rPr>
-              <a:t>    addLine('Problem', problem.message === 'Failed to fetch'</a:t>
+              <a:t>    addLine('problem', problem.message === 'Failed to fetch'</a:t>
             </a:r>
           </a:p>
           <a:p>
@@ -17280,7 +17280,7 @@
                 </a:solidFill>
                 <a:latin typeface="Consolas"/>
               </a:rPr>
-              <a:t>  addLine('You', text);</a:t>
+              <a:t>  addLine('you', text);</a:t>
             </a:r>
           </a:p>
           <a:p>
@@ -17305,7 +17305,7 @@
                 </a:solidFill>
                 <a:latin typeface="Consolas"/>
               </a:rPr>
-              <a:t>  addLine('Companion', 'thinking...');</a:t>
+              <a:t>  addLine('bot', 'thinking...');</a:t>
             </a:r>
           </a:p>
           <a:p>
@@ -17405,7 +17405,7 @@
                 </a:solidFill>
                 <a:latin typeface="Consolas"/>
               </a:rPr>
-              <a:t>    addLine('Companion', reply);</a:t>
+              <a:t>    addLine('bot', reply);</a:t>
             </a:r>
           </a:p>
           <a:p>
@@ -17530,7 +17530,7 @@
                 </a:solidFill>
                 <a:latin typeface="Consolas"/>
               </a:rPr>
-              <a:t>    addLine('Problem', problem.message === 'Failed to fetch'</a:t>
+              <a:t>    addLine('problem', problem.message === 'Failed to fetch'</a:t>
             </a:r>
           </a:p>
           <a:p>
